--- a/final/final_presentation.pptx
+++ b/final/final_presentation.pptx
@@ -3906,7 +3906,7 @@
               </a:defRPr>
             </a:pPr>
             <a:r>
-              <a:t>Tool-use tasks naturally contain structured process traces: prior API calls, arguments, and observations.</a:t>
+              <a:t>Tool-use tasks have structured process traces: prior API calls, arguments, and observations.</a:t>
             </a:r>
           </a:p>
           <a:p>
@@ -4057,7 +4057,7 @@
               </a:defRPr>
             </a:pPr>
             <a:r>
-              <a:t>Avoids claiming access to private chain-of-thought.</a:t>
+              <a:t>No claim about hidden reasoning.</a:t>
             </a:r>
           </a:p>
           <a:p>
@@ -6376,7 +6376,7 @@
                 </a:solidFill>
                 <a:latin typeface="Aptos"/>
               </a:rPr>
-              <a:t>B appears to retain more useful tool-call context, but this does not isolate context from token budget.</a:t>
+              <a:t>B keeps more context, but token budget is not controlled.</a:t>
             </a:r>
           </a:p>
         </p:txBody>
@@ -6752,7 +6752,7 @@
               </a:defRPr>
             </a:pPr>
             <a:r>
-              <a:t>The result is encouraging, not definitive.</a:t>
+              <a:t>One seed, so treat as preliminary.</a:t>
             </a:r>
           </a:p>
         </p:txBody>
@@ -7095,7 +7095,31 @@
                         </a:defRPr>
                       </a:pPr>
                       <a:r>
-                        <a:t>Exact full-call errors</a:t>
+                        <a:t>Exact full call</a:t>
+                      </a:r>
+                    </a:p>
+                  </a:txBody>
+                  <a:tcPr marL="45720" marR="45720" marT="27432" marB="27432">
+                    <a:solidFill>
+                      <a:srgbClr val="F6F8FA"/>
+                    </a:solidFill>
+                  </a:tcPr>
+                </a:tc>
+                <a:tc>
+                  <a:txBody>
+                    <a:bodyPr/>
+                    <a:lstStyle/>
+                    <a:p>
+                      <a:pPr>
+                        <a:defRPr sz="1200" b="0">
+                          <a:solidFill>
+                            <a:srgbClr val="1D2735"/>
+                          </a:solidFill>
+                          <a:latin typeface="Aptos"/>
+                        </a:defRPr>
+                      </a:pPr>
+                      <a:r>
+                        <a:t>172</a:t>
                       </a:r>
                     </a:p>
                   </a:txBody>
@@ -7143,31 +7167,7 @@
                         </a:defRPr>
                       </a:pPr>
                       <a:r>
-                        <a:t>172</a:t>
-                      </a:r>
-                    </a:p>
-                  </a:txBody>
-                  <a:tcPr marL="45720" marR="45720" marT="27432" marB="27432">
-                    <a:solidFill>
-                      <a:srgbClr val="F6F8FA"/>
-                    </a:solidFill>
-                  </a:tcPr>
-                </a:tc>
-                <a:tc>
-                  <a:txBody>
-                    <a:bodyPr/>
-                    <a:lstStyle/>
-                    <a:p>
-                      <a:pPr>
-                        <a:defRPr sz="1200" b="0">
-                          <a:solidFill>
-                            <a:srgbClr val="1D2735"/>
-                          </a:solidFill>
-                          <a:latin typeface="Aptos"/>
-                        </a:defRPr>
-                      </a:pPr>
-                      <a:r>
-                        <a:t>B lower</a:t>
+                        <a:t>B higher</a:t>
                       </a:r>
                     </a:p>
                   </a:txBody>
@@ -7291,7 +7291,7 @@
                         </a:defRPr>
                       </a:pPr>
                       <a:r>
-                        <a:t>Wrong arguments</a:t>
+                        <a:t>Wrong / partial params</a:t>
                       </a:r>
                     </a:p>
                   </a:txBody>
@@ -7315,7 +7315,7 @@
                         </a:defRPr>
                       </a:pPr>
                       <a:r>
-                        <a:t>104</a:t>
+                        <a:t>121</a:t>
                       </a:r>
                     </a:p>
                   </a:txBody>
@@ -7339,7 +7339,7 @@
                         </a:defRPr>
                       </a:pPr>
                       <a:r>
-                        <a:t>59</a:t>
+                        <a:t>76</a:t>
                       </a:r>
                     </a:p>
                   </a:txBody>
@@ -7586,7 +7586,7 @@
                 </a:solidFill>
                 <a:latin typeface="Aptos"/>
               </a:rPr>
-              <a:t>B is much better at choosing the right API, but its longer context can make exact output formatting less stable.</a:t>
+              <a:t>B is much better at choosing the right API, but longer context causes more formatting errors.</a:t>
             </a:r>
           </a:p>
         </p:txBody>
@@ -7744,7 +7744,7 @@
                 </a:solidFill>
                 <a:latin typeface="Aptos"/>
               </a:rPr>
-              <a:t>Trajectory supervision is promising, but the current evidence is a pilot.</a:t>
+              <a:t>Current evidence is a single-seed pilot.</a:t>
             </a:r>
           </a:p>
         </p:txBody>
@@ -7867,7 +7867,7 @@
                 </a:solidFill>
                 <a:latin typeface="Aptos"/>
               </a:rPr>
-              <a:t>Novelty</a:t>
+              <a:t>What we did</a:t>
             </a:r>
           </a:p>
         </p:txBody>
@@ -8259,7 +8259,7 @@
                 </a:solidFill>
                 <a:latin typeface="Aptos"/>
               </a:rPr>
-              <a:t>Bottom line: keeping observable trajectory context improves tool identity and final exact-call accuracy in this setup.</a:t>
+              <a:t>Keeping observable trajectory context improves tool identity and final exact-call accuracy in this setup.</a:t>
             </a:r>
           </a:p>
         </p:txBody>

--- a/final/final_presentation.pptx
+++ b/final/final_presentation.pptx
@@ -139,11 +139,11 @@
           </c:tx>
           <c:spPr>
             <a:solidFill>
-              <a:srgbClr val="B94846"/>
+              <a:srgbClr val="B54745"/>
             </a:solidFill>
             <a:ln>
               <a:solidFill>
-                <a:srgbClr val="B94846"/>
+                <a:srgbClr val="B54745"/>
               </a:solidFill>
             </a:ln>
           </c:spPr>
@@ -205,11 +205,11 @@
           </c:tx>
           <c:spPr>
             <a:solidFill>
-              <a:srgbClr val="148479"/>
+              <a:srgbClr val="128479"/>
             </a:solidFill>
             <a:ln>
               <a:solidFill>
-                <a:srgbClr val="148479"/>
+                <a:srgbClr val="128479"/>
               </a:solidFill>
             </a:ln>
           </c:spPr>
@@ -3301,8 +3301,8 @@
         </p:nvSpPr>
         <p:spPr>
           <a:xfrm>
-            <a:off x="658368" y="658368"/>
-            <a:ext cx="7863840" cy="1188720"/>
+            <a:off x="713232" y="749808"/>
+            <a:ext cx="6583680" cy="1097280"/>
           </a:xfrm>
           <a:prstGeom prst="rect">
             <a:avLst/>
@@ -3310,20 +3310,25 @@
           <a:noFill/>
         </p:spPr>
         <p:txBody>
-          <a:bodyPr wrap="none" lIns="36576" rIns="36576" tIns="18288" bIns="18288" anchor="t">
+          <a:bodyPr wrap="square" lIns="27432" rIns="27432" tIns="18288" bIns="18288" anchor="t">
             <a:spAutoFit/>
           </a:bodyPr>
           <a:lstStyle/>
           <a:p>
-            <a:pPr algn="l"/>
-            <a:r>
-              <a:rPr sz="3600" b="1">
-                <a:solidFill>
-                  <a:srgbClr val="1D2735"/>
-                </a:solidFill>
-                <a:latin typeface="Aptos"/>
+            <a:pPr algn="l">
+              <a:spcAft>
+                <a:spcPts val="300"/>
+              </a:spcAft>
+            </a:pPr>
+            <a:r>
+              <a:rPr sz="3100" b="1">
+                <a:solidFill>
+                  <a:srgbClr val="1C2634"/>
+                </a:solidFill>
+                <a:latin typeface="Helvetica Neue"/>
               </a:rPr>
-              <a:t>Trajectory supervision for continual tool-use learning</a:t>
+              <a:t>Trajectory supervision for
+continual tool-use learning</a:t>
             </a:r>
           </a:p>
         </p:txBody>
@@ -3336,8 +3341,8 @@
         </p:nvSpPr>
         <p:spPr>
           <a:xfrm>
-            <a:off x="694944" y="1847088"/>
-            <a:ext cx="6949440" cy="329184"/>
+            <a:off x="749808" y="2039112"/>
+            <a:ext cx="6583680" cy="292608"/>
           </a:xfrm>
           <a:prstGeom prst="rect">
             <a:avLst/>
@@ -3345,18 +3350,22 @@
           <a:noFill/>
         </p:spPr>
         <p:txBody>
-          <a:bodyPr wrap="none" lIns="36576" rIns="36576" tIns="18288" bIns="18288" anchor="t">
+          <a:bodyPr wrap="square" lIns="27432" rIns="27432" tIns="18288" bIns="18288" anchor="t">
             <a:spAutoFit/>
           </a:bodyPr>
           <a:lstStyle/>
           <a:p>
-            <a:pPr algn="l"/>
-            <a:r>
-              <a:rPr sz="1700" b="0">
-                <a:solidFill>
-                  <a:srgbClr val="5E6C84"/>
-                </a:solidFill>
-                <a:latin typeface="Aptos"/>
+            <a:pPr algn="l">
+              <a:spcAft>
+                <a:spcPts val="300"/>
+              </a:spcAft>
+            </a:pPr>
+            <a:r>
+              <a:rPr sz="1500" b="0">
+                <a:solidFill>
+                  <a:srgbClr val="596880"/>
+                </a:solidFill>
+                <a:latin typeface="Helvetica Neue"/>
               </a:rPr>
               <a:t>Single-seed Llama 3.1 8B QLoRA pilot on API-Bank</a:t>
             </a:r>
@@ -3365,25 +3374,102 @@
       </p:sp>
       <p:sp>
         <p:nvSpPr>
-          <p:cNvPr id="4" name="Rounded Rectangle 3"/>
+          <p:cNvPr id="4" name="TextBox 3"/>
+          <p:cNvSpPr txBox="1"/>
+          <p:nvPr/>
+        </p:nvSpPr>
+        <p:spPr>
+          <a:xfrm>
+            <a:off x="8302752" y="932688"/>
+            <a:ext cx="2377440" cy="502920"/>
+          </a:xfrm>
+          <a:prstGeom prst="rect">
+            <a:avLst/>
+          </a:prstGeom>
+          <a:noFill/>
+        </p:spPr>
+        <p:txBody>
+          <a:bodyPr wrap="square" lIns="27432" rIns="27432" tIns="18288" bIns="18288" anchor="t">
+            <a:spAutoFit/>
+          </a:bodyPr>
+          <a:lstStyle/>
+          <a:p>
+            <a:pPr algn="ctr">
+              <a:spcAft>
+                <a:spcPts val="300"/>
+              </a:spcAft>
+            </a:pPr>
+            <a:r>
+              <a:rPr sz="3100" b="1">
+                <a:solidFill>
+                  <a:srgbClr val="128479"/>
+                </a:solidFill>
+                <a:latin typeface="Helvetica Neue"/>
+              </a:rPr>
+              <a:t>+17.7 pts</a:t>
+            </a:r>
+          </a:p>
+        </p:txBody>
+      </p:sp>
+      <p:sp>
+        <p:nvSpPr>
+          <p:cNvPr id="5" name="TextBox 4"/>
+          <p:cNvSpPr txBox="1"/>
+          <p:nvPr/>
+        </p:nvSpPr>
+        <p:spPr>
+          <a:xfrm>
+            <a:off x="8266175" y="1627632"/>
+            <a:ext cx="2468880" cy="384048"/>
+          </a:xfrm>
+          <a:prstGeom prst="rect">
+            <a:avLst/>
+          </a:prstGeom>
+          <a:noFill/>
+        </p:spPr>
+        <p:txBody>
+          <a:bodyPr wrap="square" lIns="27432" rIns="27432" tIns="18288" bIns="18288" anchor="t">
+            <a:spAutoFit/>
+          </a:bodyPr>
+          <a:lstStyle/>
+          <a:p>
+            <a:pPr algn="ctr">
+              <a:spcAft>
+                <a:spcPts val="300"/>
+              </a:spcAft>
+            </a:pPr>
+            <a:r>
+              <a:rPr sz="1200" b="0">
+                <a:solidFill>
+                  <a:srgbClr val="1C2634"/>
+                </a:solidFill>
+                <a:latin typeface="Helvetica Neue"/>
+              </a:rPr>
+              <a:t>final exact full-call accuracy
+B over A</a:t>
+            </a:r>
+          </a:p>
+        </p:txBody>
+      </p:sp>
+      <p:sp>
+        <p:nvSpPr>
+          <p:cNvPr id="6" name="Rectangle 5"/>
           <p:cNvSpPr/>
           <p:nvPr/>
         </p:nvSpPr>
         <p:spPr>
           <a:xfrm>
-            <a:off x="8183879" y="713232"/>
-            <a:ext cx="3246120" cy="2651760"/>
-          </a:xfrm>
-          <a:prstGeom prst="roundRect">
+            <a:off x="658368" y="2761488"/>
+            <a:ext cx="10881360" cy="18288"/>
+          </a:xfrm>
+          <a:prstGeom prst="rect">
             <a:avLst/>
           </a:prstGeom>
           <a:solidFill>
-            <a:srgbClr val="FFFFFF"/>
+            <a:srgbClr val="D7DCE4"/>
           </a:solidFill>
-          <a:ln w="9525">
-            <a:solidFill>
-              <a:srgbClr val="D9DEE5"/>
-            </a:solidFill>
+          <a:ln>
+            <a:noFill/>
           </a:ln>
         </p:spPr>
         <p:style>
@@ -3410,14 +3496,14 @@
       </p:sp>
       <p:sp>
         <p:nvSpPr>
-          <p:cNvPr id="5" name="TextBox 4"/>
+          <p:cNvPr id="7" name="TextBox 6"/>
           <p:cNvSpPr txBox="1"/>
           <p:nvPr/>
         </p:nvSpPr>
         <p:spPr>
           <a:xfrm>
-            <a:off x="8458200" y="1078992"/>
-            <a:ext cx="2697480" cy="694944"/>
+            <a:off x="804672" y="3154680"/>
+            <a:ext cx="9784080" cy="1417320"/>
           </a:xfrm>
           <a:prstGeom prst="rect">
             <a:avLst/>
@@ -3425,34 +3511,70 @@
           <a:noFill/>
         </p:spPr>
         <p:txBody>
-          <a:bodyPr wrap="none" lIns="36576" rIns="36576" tIns="18288" bIns="18288" anchor="t">
+          <a:bodyPr wrap="square" lIns="36576" rIns="36576" tIns="18288" bIns="18288">
             <a:spAutoFit/>
           </a:bodyPr>
           <a:lstStyle/>
           <a:p>
-            <a:pPr algn="ctr"/>
-            <a:r>
-              <a:rPr sz="3800" b="1">
-                <a:solidFill>
-                  <a:srgbClr val="148479"/>
-                </a:solidFill>
-                <a:latin typeface="Aptos"/>
-              </a:rPr>
-              <a:t>+17.7 pts</a:t>
-            </a:r>
-          </a:p>
-        </p:txBody>
-      </p:sp>
-      <p:sp>
-        <p:nvSpPr>
-          <p:cNvPr id="6" name="TextBox 5"/>
+            <a:pPr>
+              <a:spcAft>
+                <a:spcPts val="1000"/>
+              </a:spcAft>
+              <a:defRPr sz="1800">
+                <a:solidFill>
+                  <a:srgbClr val="1C2634"/>
+                </a:solidFill>
+                <a:latin typeface="Helvetica Neue"/>
+              </a:defRPr>
+            </a:pPr>
+            <a:r>
+              <a:t>Question: does API trajectory context help continual tool-use fine-tuning?</a:t>
+            </a:r>
+          </a:p>
+          <a:p>
+            <a:pPr>
+              <a:spcAft>
+                <a:spcPts val="1000"/>
+              </a:spcAft>
+              <a:defRPr sz="1800">
+                <a:solidFill>
+                  <a:srgbClr val="1C2634"/>
+                </a:solidFill>
+                <a:latin typeface="Helvetica Neue"/>
+              </a:defRPr>
+            </a:pPr>
+            <a:r>
+              <a:t>Result: B improves exact calls and API selection.</a:t>
+            </a:r>
+          </a:p>
+          <a:p>
+            <a:pPr>
+              <a:spcAft>
+                <a:spcPts val="1000"/>
+              </a:spcAft>
+              <a:defRPr sz="1800">
+                <a:solidFill>
+                  <a:srgbClr val="1C2634"/>
+                </a:solidFill>
+                <a:latin typeface="Helvetica Neue"/>
+              </a:defRPr>
+            </a:pPr>
+            <a:r>
+              <a:t>Caveat: one seed, and B has 25.1% more training tokens.</a:t>
+            </a:r>
+          </a:p>
+        </p:txBody>
+      </p:sp>
+      <p:sp>
+        <p:nvSpPr>
+          <p:cNvPr id="8" name="TextBox 7"/>
           <p:cNvSpPr txBox="1"/>
           <p:nvPr/>
         </p:nvSpPr>
         <p:spPr>
           <a:xfrm>
-            <a:off x="8613648" y="1847088"/>
-            <a:ext cx="2377440" cy="658368"/>
+            <a:off x="749808" y="5559552"/>
+            <a:ext cx="8229600" cy="228600"/>
           </a:xfrm>
           <a:prstGeom prst="rect">
             <a:avLst/>
@@ -3460,35 +3582,38 @@
           <a:noFill/>
         </p:spPr>
         <p:txBody>
-          <a:bodyPr wrap="none" lIns="36576" rIns="36576" tIns="18288" bIns="18288" anchor="t">
+          <a:bodyPr wrap="square" lIns="27432" rIns="27432" tIns="18288" bIns="18288" anchor="t">
             <a:spAutoFit/>
           </a:bodyPr>
           <a:lstStyle/>
           <a:p>
-            <a:pPr algn="ctr"/>
-            <a:r>
-              <a:rPr sz="1400" b="0">
-                <a:solidFill>
-                  <a:srgbClr val="1D2735"/>
-                </a:solidFill>
-                <a:latin typeface="Aptos"/>
+            <a:pPr algn="l">
+              <a:spcAft>
+                <a:spcPts val="300"/>
+              </a:spcAft>
+            </a:pPr>
+            <a:r>
+              <a:rPr sz="1200" b="0">
+                <a:solidFill>
+                  <a:srgbClr val="1C2634"/>
+                </a:solidFill>
+                <a:latin typeface="Helvetica Neue"/>
               </a:rPr>
-              <a:t>final exact full-call accuracy
-Condition B over A</a:t>
-            </a:r>
-          </a:p>
-        </p:txBody>
-      </p:sp>
-      <p:sp>
-        <p:nvSpPr>
-          <p:cNvPr id="7" name="TextBox 6"/>
+              <a:t>Vishnu Vardhan Reddy B, Sagnik Chatterjee, Soumik Bhatta</a:t>
+            </a:r>
+          </a:p>
+        </p:txBody>
+      </p:sp>
+      <p:sp>
+        <p:nvSpPr>
+          <p:cNvPr id="9" name="TextBox 8"/>
           <p:cNvSpPr txBox="1"/>
           <p:nvPr/>
         </p:nvSpPr>
         <p:spPr>
           <a:xfrm>
-            <a:off x="8485632" y="2788920"/>
-            <a:ext cx="2743200" cy="292608"/>
+            <a:off x="749808" y="5833872"/>
+            <a:ext cx="3657600" cy="182880"/>
           </a:xfrm>
           <a:prstGeom prst="rect">
             <a:avLst/>
@@ -3496,34 +3621,38 @@
           <a:noFill/>
         </p:spPr>
         <p:txBody>
-          <a:bodyPr wrap="none" lIns="36576" rIns="36576" tIns="18288" bIns="18288" anchor="t">
+          <a:bodyPr wrap="square" lIns="27432" rIns="27432" tIns="18288" bIns="18288" anchor="t">
             <a:spAutoFit/>
           </a:bodyPr>
           <a:lstStyle/>
           <a:p>
-            <a:pPr algn="ctr"/>
-            <a:r>
-              <a:rPr sz="1100" b="0">
-                <a:solidFill>
-                  <a:srgbClr val="5E6C84"/>
-                </a:solidFill>
-                <a:latin typeface="Aptos"/>
+            <a:pPr algn="l">
+              <a:spcAft>
+                <a:spcPts val="300"/>
+              </a:spcAft>
+            </a:pPr>
+            <a:r>
+              <a:rPr sz="900" b="0">
+                <a:solidFill>
+                  <a:srgbClr val="596880"/>
+                </a:solidFill>
+                <a:latin typeface="Helvetica Neue"/>
               </a:rPr>
-              <a:t>A: stripped context  |  B: trajectory context</a:t>
-            </a:r>
-          </a:p>
-        </p:txBody>
-      </p:sp>
-      <p:sp>
-        <p:nvSpPr>
-          <p:cNvPr id="8" name="TextBox 7"/>
+              <a:t>CS 590NN / 690NN Final Project</a:t>
+            </a:r>
+          </a:p>
+        </p:txBody>
+      </p:sp>
+      <p:sp>
+        <p:nvSpPr>
+          <p:cNvPr id="10" name="TextBox 9"/>
           <p:cNvSpPr txBox="1"/>
           <p:nvPr/>
         </p:nvSpPr>
         <p:spPr>
           <a:xfrm>
-            <a:off x="786384" y="2944368"/>
-            <a:ext cx="7132320" cy="1481328"/>
+            <a:off x="658368" y="6464808"/>
+            <a:ext cx="2743200" cy="164592"/>
           </a:xfrm>
           <a:prstGeom prst="rect">
             <a:avLst/>
@@ -3531,70 +3660,38 @@
           <a:noFill/>
         </p:spPr>
         <p:txBody>
-          <a:bodyPr wrap="none" lIns="73152" rIns="73152" tIns="27432" bIns="27432">
+          <a:bodyPr wrap="square" lIns="27432" rIns="27432" tIns="18288" bIns="18288" anchor="t">
             <a:spAutoFit/>
           </a:bodyPr>
           <a:lstStyle/>
           <a:p>
-            <a:pPr>
-              <a:spcAft>
-                <a:spcPts val="1000"/>
-              </a:spcAft>
-              <a:defRPr sz="2000">
-                <a:solidFill>
-                  <a:srgbClr val="1D2735"/>
-                </a:solidFill>
-                <a:latin typeface="Aptos"/>
-              </a:defRPr>
-            </a:pPr>
-            <a:r>
-              <a:t>Question: does preserving API-call trajectory context help continual tool-use fine-tuning?</a:t>
-            </a:r>
-          </a:p>
-          <a:p>
-            <a:pPr>
-              <a:spcAft>
-                <a:spcPts val="1000"/>
-              </a:spcAft>
-              <a:defRPr sz="2000">
-                <a:solidFill>
-                  <a:srgbClr val="1D2735"/>
-                </a:solidFill>
-                <a:latin typeface="Aptos"/>
-              </a:defRPr>
-            </a:pPr>
-            <a:r>
-              <a:t>Result: B improves API selection and final exact calls, but formatting errors increase.</a:t>
-            </a:r>
-          </a:p>
-          <a:p>
-            <a:pPr>
-              <a:spcAft>
-                <a:spcPts val="1000"/>
-              </a:spcAft>
-              <a:defRPr sz="2000">
-                <a:solidFill>
-                  <a:srgbClr val="1D2735"/>
-                </a:solidFill>
-                <a:latin typeface="Aptos"/>
-              </a:defRPr>
-            </a:pPr>
-            <a:r>
-              <a:t>Caveat: one seed and B has 25.1% more training tokens.</a:t>
-            </a:r>
-          </a:p>
-        </p:txBody>
-      </p:sp>
-      <p:sp>
-        <p:nvSpPr>
-          <p:cNvPr id="9" name="TextBox 8"/>
+            <a:pPr algn="l">
+              <a:spcAft>
+                <a:spcPts val="300"/>
+              </a:spcAft>
+            </a:pPr>
+            <a:r>
+              <a:rPr sz="700" b="0">
+                <a:solidFill>
+                  <a:srgbClr val="596880"/>
+                </a:solidFill>
+                <a:latin typeface="Helvetica Neue"/>
+              </a:rPr>
+              <a:t>CS 590NN Final Project</a:t>
+            </a:r>
+          </a:p>
+        </p:txBody>
+      </p:sp>
+      <p:sp>
+        <p:nvSpPr>
+          <p:cNvPr id="11" name="TextBox 10"/>
           <p:cNvSpPr txBox="1"/>
           <p:nvPr/>
         </p:nvSpPr>
         <p:spPr>
           <a:xfrm>
-            <a:off x="713232" y="5559552"/>
-            <a:ext cx="7955279" cy="310896"/>
+            <a:off x="11320272" y="6464808"/>
+            <a:ext cx="228600" cy="164592"/>
           </a:xfrm>
           <a:prstGeom prst="rect">
             <a:avLst/>
@@ -3602,123 +3699,22 @@
           <a:noFill/>
         </p:spPr>
         <p:txBody>
-          <a:bodyPr wrap="none" lIns="36576" rIns="36576" tIns="18288" bIns="18288" anchor="t">
+          <a:bodyPr wrap="square" lIns="27432" rIns="27432" tIns="18288" bIns="18288" anchor="t">
             <a:spAutoFit/>
           </a:bodyPr>
           <a:lstStyle/>
           <a:p>
-            <a:pPr algn="l"/>
-            <a:r>
-              <a:rPr sz="1400" b="0">
-                <a:solidFill>
-                  <a:srgbClr val="1D2735"/>
-                </a:solidFill>
-                <a:latin typeface="Aptos"/>
-              </a:rPr>
-              <a:t>Vishnu Vardhan Reddy B, Sagnik Chatterjee, Soumik Bhatta</a:t>
-            </a:r>
-          </a:p>
-        </p:txBody>
-      </p:sp>
-      <p:sp>
-        <p:nvSpPr>
-          <p:cNvPr id="10" name="TextBox 9"/>
-          <p:cNvSpPr txBox="1"/>
-          <p:nvPr/>
-        </p:nvSpPr>
-        <p:spPr>
-          <a:xfrm>
-            <a:off x="713232" y="5870448"/>
-            <a:ext cx="4937760" cy="256032"/>
-          </a:xfrm>
-          <a:prstGeom prst="rect">
-            <a:avLst/>
-          </a:prstGeom>
-          <a:noFill/>
-        </p:spPr>
-        <p:txBody>
-          <a:bodyPr wrap="none" lIns="36576" rIns="36576" tIns="18288" bIns="18288" anchor="t">
-            <a:spAutoFit/>
-          </a:bodyPr>
-          <a:lstStyle/>
-          <a:p>
-            <a:pPr algn="l"/>
-            <a:r>
-              <a:rPr sz="1100" b="0">
-                <a:solidFill>
-                  <a:srgbClr val="5E6C84"/>
-                </a:solidFill>
-                <a:latin typeface="Aptos"/>
-              </a:rPr>
-              <a:t>CS 590NN / 690NN Final Project</a:t>
-            </a:r>
-          </a:p>
-        </p:txBody>
-      </p:sp>
-      <p:sp>
-        <p:nvSpPr>
-          <p:cNvPr id="11" name="TextBox 10"/>
-          <p:cNvSpPr txBox="1"/>
-          <p:nvPr/>
-        </p:nvSpPr>
-        <p:spPr>
-          <a:xfrm>
-            <a:off x="603504" y="6437376"/>
-            <a:ext cx="2926080" cy="201168"/>
-          </a:xfrm>
-          <a:prstGeom prst="rect">
-            <a:avLst/>
-          </a:prstGeom>
-          <a:noFill/>
-        </p:spPr>
-        <p:txBody>
-          <a:bodyPr wrap="none" lIns="36576" rIns="36576" tIns="18288" bIns="18288" anchor="t">
-            <a:spAutoFit/>
-          </a:bodyPr>
-          <a:lstStyle/>
-          <a:p>
-            <a:pPr algn="l"/>
-            <a:r>
-              <a:rPr sz="800" b="0">
-                <a:solidFill>
-                  <a:srgbClr val="5E6C84"/>
-                </a:solidFill>
-                <a:latin typeface="Aptos"/>
-              </a:rPr>
-              <a:t>CS 590NN Final Project</a:t>
-            </a:r>
-          </a:p>
-        </p:txBody>
-      </p:sp>
-      <p:sp>
-        <p:nvSpPr>
-          <p:cNvPr id="12" name="TextBox 11"/>
-          <p:cNvSpPr txBox="1"/>
-          <p:nvPr/>
-        </p:nvSpPr>
-        <p:spPr>
-          <a:xfrm>
-            <a:off x="11247120" y="6437376"/>
-            <a:ext cx="320040" cy="201168"/>
-          </a:xfrm>
-          <a:prstGeom prst="rect">
-            <a:avLst/>
-          </a:prstGeom>
-          <a:noFill/>
-        </p:spPr>
-        <p:txBody>
-          <a:bodyPr wrap="none" lIns="36576" rIns="36576" tIns="18288" bIns="18288" anchor="t">
-            <a:spAutoFit/>
-          </a:bodyPr>
-          <a:lstStyle/>
-          <a:p>
-            <a:pPr algn="r"/>
-            <a:r>
-              <a:rPr sz="800" b="0">
-                <a:solidFill>
-                  <a:srgbClr val="5E6C84"/>
-                </a:solidFill>
-                <a:latin typeface="Aptos"/>
+            <a:pPr algn="r">
+              <a:spcAft>
+                <a:spcPts val="300"/>
+              </a:spcAft>
+            </a:pPr>
+            <a:r>
+              <a:rPr sz="700" b="0">
+                <a:solidFill>
+                  <a:srgbClr val="596880"/>
+                </a:solidFill>
+                <a:latin typeface="Helvetica Neue"/>
               </a:rPr>
               <a:t>1</a:t>
             </a:r>
@@ -3751,8 +3747,8 @@
         </p:nvSpPr>
         <p:spPr>
           <a:xfrm>
-            <a:off x="594360" y="329184"/>
-            <a:ext cx="9875520" cy="530352"/>
+            <a:off x="658368" y="347472"/>
+            <a:ext cx="10789920" cy="393192"/>
           </a:xfrm>
           <a:prstGeom prst="rect">
             <a:avLst/>
@@ -3760,18 +3756,22 @@
           <a:noFill/>
         </p:spPr>
         <p:txBody>
-          <a:bodyPr wrap="none" lIns="36576" rIns="36576" tIns="18288" bIns="18288" anchor="t">
+          <a:bodyPr wrap="square" lIns="27432" rIns="27432" tIns="18288" bIns="18288" anchor="t">
             <a:spAutoFit/>
           </a:bodyPr>
           <a:lstStyle/>
           <a:p>
-            <a:pPr algn="l"/>
-            <a:r>
-              <a:rPr sz="2900" b="1">
-                <a:solidFill>
-                  <a:srgbClr val="1D2735"/>
-                </a:solidFill>
-                <a:latin typeface="Aptos"/>
+            <a:pPr algn="l">
+              <a:spcAft>
+                <a:spcPts val="300"/>
+              </a:spcAft>
+            </a:pPr>
+            <a:r>
+              <a:rPr sz="2500" b="1">
+                <a:solidFill>
+                  <a:srgbClr val="1C2634"/>
+                </a:solidFill>
+                <a:latin typeface="Helvetica Neue"/>
               </a:rPr>
               <a:t>Motivation</a:t>
             </a:r>
@@ -3786,8 +3786,8 @@
         </p:nvSpPr>
         <p:spPr>
           <a:xfrm>
-            <a:off x="621792" y="850392"/>
-            <a:ext cx="9692640" cy="310896"/>
+            <a:off x="676656" y="786384"/>
+            <a:ext cx="10424160" cy="256032"/>
           </a:xfrm>
           <a:prstGeom prst="rect">
             <a:avLst/>
@@ -3795,20 +3795,24 @@
           <a:noFill/>
         </p:spPr>
         <p:txBody>
-          <a:bodyPr wrap="none" lIns="36576" rIns="36576" tIns="18288" bIns="18288" anchor="t">
+          <a:bodyPr wrap="square" lIns="27432" rIns="27432" tIns="18288" bIns="18288" anchor="t">
             <a:spAutoFit/>
           </a:bodyPr>
           <a:lstStyle/>
           <a:p>
-            <a:pPr algn="l"/>
-            <a:r>
-              <a:rPr sz="1300" b="0">
-                <a:solidFill>
-                  <a:srgbClr val="5E6C84"/>
-                </a:solidFill>
-                <a:latin typeface="Aptos"/>
+            <a:pPr algn="l">
+              <a:spcAft>
+                <a:spcPts val="300"/>
+              </a:spcAft>
+            </a:pPr>
+            <a:r>
+              <a:rPr sz="1100" b="0">
+                <a:solidFill>
+                  <a:srgbClr val="596880"/>
+                </a:solidFill>
+                <a:latin typeface="Helvetica Neue"/>
               </a:rPr>
-              <a:t>Tool-use learning often discards the intermediate action trace.</a:t>
+              <a:t>The useful signal is the observable tool-use trace.</a:t>
             </a:r>
           </a:p>
         </p:txBody>
@@ -3821,14 +3825,14 @@
         </p:nvSpPr>
         <p:spPr>
           <a:xfrm>
-            <a:off x="603504" y="1152144"/>
-            <a:ext cx="10972800" cy="18288"/>
+            <a:off x="658368" y="1078992"/>
+            <a:ext cx="10881360" cy="18288"/>
           </a:xfrm>
           <a:prstGeom prst="rect">
             <a:avLst/>
           </a:prstGeom>
           <a:solidFill>
-            <a:srgbClr val="D9DEE5"/>
+            <a:srgbClr val="D7DCE4"/>
           </a:solidFill>
           <a:ln>
             <a:noFill/>
@@ -3864,8 +3868,8 @@
         </p:nvSpPr>
         <p:spPr>
           <a:xfrm>
-            <a:off x="713232" y="1536192"/>
-            <a:ext cx="5669280" cy="1920240"/>
+            <a:off x="868680" y="1572768"/>
+            <a:ext cx="4937760" cy="347472"/>
           </a:xfrm>
           <a:prstGeom prst="rect">
             <a:avLst/>
@@ -3873,24 +3877,63 @@
           <a:noFill/>
         </p:spPr>
         <p:txBody>
-          <a:bodyPr wrap="none" lIns="73152" rIns="73152" tIns="27432" bIns="27432">
+          <a:bodyPr wrap="square" lIns="27432" rIns="27432" tIns="18288" bIns="18288" anchor="t">
             <a:spAutoFit/>
           </a:bodyPr>
           <a:lstStyle/>
           <a:p>
+            <a:pPr algn="l">
+              <a:spcAft>
+                <a:spcPts val="300"/>
+              </a:spcAft>
+            </a:pPr>
+            <a:r>
+              <a:rPr sz="2200" b="1">
+                <a:solidFill>
+                  <a:srgbClr val="1C2634"/>
+                </a:solidFill>
+                <a:latin typeface="Helvetica Neue"/>
+              </a:rPr>
+              <a:t>Final answers hide the path</a:t>
+            </a:r>
+          </a:p>
+        </p:txBody>
+      </p:sp>
+      <p:sp>
+        <p:nvSpPr>
+          <p:cNvPr id="6" name="TextBox 5"/>
+          <p:cNvSpPr txBox="1"/>
+          <p:nvPr/>
+        </p:nvSpPr>
+        <p:spPr>
+          <a:xfrm>
+            <a:off x="896112" y="2487168"/>
+            <a:ext cx="5029200" cy="1554480"/>
+          </a:xfrm>
+          <a:prstGeom prst="rect">
+            <a:avLst/>
+          </a:prstGeom>
+          <a:noFill/>
+        </p:spPr>
+        <p:txBody>
+          <a:bodyPr wrap="square" lIns="36576" rIns="36576" tIns="18288" bIns="18288">
+            <a:spAutoFit/>
+          </a:bodyPr>
+          <a:lstStyle/>
+          <a:p>
             <a:pPr>
               <a:spcAft>
                 <a:spcPts val="1000"/>
               </a:spcAft>
-              <a:defRPr sz="2200">
-                <a:solidFill>
-                  <a:srgbClr val="1D2735"/>
-                </a:solidFill>
-                <a:latin typeface="Aptos"/>
+              <a:defRPr sz="1700">
+                <a:solidFill>
+                  <a:srgbClr val="1C2634"/>
+                </a:solidFill>
+                <a:latin typeface="Helvetica Neue"/>
               </a:defRPr>
             </a:pPr>
             <a:r>
-              <a:t>Many fine-tuning examples supervise the final answer or next call in isolation.</a:t>
+              <a:t>Tool-use examples include API calls, arguments, and observations.</a:t>
             </a:r>
           </a:p>
           <a:p>
@@ -3898,15 +3941,15 @@
               <a:spcAft>
                 <a:spcPts val="1000"/>
               </a:spcAft>
-              <a:defRPr sz="2200">
-                <a:solidFill>
-                  <a:srgbClr val="1D2735"/>
-                </a:solidFill>
-                <a:latin typeface="Aptos"/>
+              <a:defRPr sz="1700">
+                <a:solidFill>
+                  <a:srgbClr val="1C2634"/>
+                </a:solidFill>
+                <a:latin typeface="Helvetica Neue"/>
               </a:defRPr>
             </a:pPr>
             <a:r>
-              <a:t>Tool-use tasks have structured process traces: prior API calls, arguments, and observations.</a:t>
+              <a:t>Those traces are not private reasoning.</a:t>
             </a:r>
           </a:p>
           <a:p>
@@ -3914,61 +3957,16 @@
               <a:spcAft>
                 <a:spcPts val="1000"/>
               </a:spcAft>
-              <a:defRPr sz="2200">
-                <a:solidFill>
-                  <a:srgbClr val="1D2735"/>
-                </a:solidFill>
-                <a:latin typeface="Aptos"/>
+              <a:defRPr sz="1700">
+                <a:solidFill>
+                  <a:srgbClr val="1C2634"/>
+                </a:solidFill>
+                <a:latin typeface="Helvetica Neue"/>
               </a:defRPr>
             </a:pPr>
             <a:r>
-              <a:t>We test whether keeping that trace helps the model retain API behavior across sequential training blocks.</a:t>
-            </a:r>
-          </a:p>
-        </p:txBody>
-      </p:sp>
-      <p:sp>
-        <p:nvSpPr>
-          <p:cNvPr id="6" name="Rounded Rectangle 5"/>
-          <p:cNvSpPr/>
-          <p:nvPr/>
-        </p:nvSpPr>
-        <p:spPr>
-          <a:xfrm>
-            <a:off x="6729984" y="1499616"/>
-            <a:ext cx="4526280" cy="2880360"/>
-          </a:xfrm>
-          <a:prstGeom prst="roundRect">
-            <a:avLst/>
-          </a:prstGeom>
-          <a:solidFill>
-            <a:srgbClr val="FFFFFF"/>
-          </a:solidFill>
-          <a:ln w="9525">
-            <a:solidFill>
-              <a:srgbClr val="D9DEE5"/>
-            </a:solidFill>
-          </a:ln>
-        </p:spPr>
-        <p:style>
-          <a:lnRef idx="1">
-            <a:schemeClr val="accent1"/>
-          </a:lnRef>
-          <a:fillRef idx="3">
-            <a:schemeClr val="accent1"/>
-          </a:fillRef>
-          <a:effectRef idx="2">
-            <a:schemeClr val="accent1"/>
-          </a:effectRef>
-          <a:fontRef idx="minor">
-            <a:schemeClr val="lt1"/>
-          </a:fontRef>
-        </p:style>
-        <p:txBody>
-          <a:bodyPr rtlCol="0" anchor="ctr"/>
-          <a:lstStyle/>
-          <a:p>
-            <a:pPr algn="ctr"/>
+              <a:t>They still give an action-observation history before the next API call.</a:t>
+            </a:r>
           </a:p>
         </p:txBody>
       </p:sp>
@@ -3980,8 +3978,8 @@
         </p:nvSpPr>
         <p:spPr>
           <a:xfrm>
-            <a:off x="7059168" y="1810512"/>
-            <a:ext cx="3840480" cy="329184"/>
+            <a:off x="6565392" y="1572768"/>
+            <a:ext cx="3657600" cy="310896"/>
           </a:xfrm>
           <a:prstGeom prst="rect">
             <a:avLst/>
@@ -3989,20 +3987,24 @@
           <a:noFill/>
         </p:spPr>
         <p:txBody>
-          <a:bodyPr wrap="none" lIns="36576" rIns="36576" tIns="18288" bIns="18288" anchor="t">
+          <a:bodyPr wrap="square" lIns="27432" rIns="27432" tIns="18288" bIns="18288" anchor="t">
             <a:spAutoFit/>
           </a:bodyPr>
           <a:lstStyle/>
           <a:p>
-            <a:pPr algn="l"/>
-            <a:r>
-              <a:rPr sz="2100" b="1">
-                <a:solidFill>
-                  <a:srgbClr val="1D2735"/>
-                </a:solidFill>
-                <a:latin typeface="Aptos"/>
+            <a:pPr algn="l">
+              <a:spcAft>
+                <a:spcPts val="300"/>
+              </a:spcAft>
+            </a:pPr>
+            <a:r>
+              <a:rPr sz="2200" b="1">
+                <a:solidFill>
+                  <a:srgbClr val="128479"/>
+                </a:solidFill>
+                <a:latin typeface="Helvetica Neue"/>
               </a:rPr>
-              <a:t>Process proxy, not hidden reasoning</a:t>
+              <a:t>Our comparison</a:t>
             </a:r>
           </a:p>
         </p:txBody>
@@ -4015,8 +4017,8 @@
         </p:nvSpPr>
         <p:spPr>
           <a:xfrm>
-            <a:off x="7059168" y="2340864"/>
-            <a:ext cx="3703320" cy="1444752"/>
+            <a:off x="6601968" y="2148840"/>
+            <a:ext cx="4297680" cy="1280160"/>
           </a:xfrm>
           <a:prstGeom prst="rect">
             <a:avLst/>
@@ -4024,56 +4026,56 @@
           <a:noFill/>
         </p:spPr>
         <p:txBody>
-          <a:bodyPr wrap="none" lIns="73152" rIns="73152" tIns="27432" bIns="27432">
+          <a:bodyPr wrap="square" lIns="36576" rIns="36576" tIns="18288" bIns="18288">
             <a:spAutoFit/>
           </a:bodyPr>
           <a:lstStyle/>
           <a:p>
             <a:pPr>
               <a:spcAft>
-                <a:spcPts val="1000"/>
-              </a:spcAft>
-              <a:defRPr sz="1700">
-                <a:solidFill>
-                  <a:srgbClr val="1D2735"/>
-                </a:solidFill>
-                <a:latin typeface="Aptos"/>
+                <a:spcPts val="1200"/>
+              </a:spcAft>
+              <a:defRPr sz="1800">
+                <a:solidFill>
+                  <a:srgbClr val="1C2634"/>
+                </a:solidFill>
+                <a:latin typeface="Helvetica Neue"/>
               </a:defRPr>
             </a:pPr>
             <a:r>
-              <a:t>Uses observable API trajectory fields.</a:t>
+              <a:t>A: stripped context</a:t>
             </a:r>
           </a:p>
           <a:p>
             <a:pPr>
               <a:spcAft>
-                <a:spcPts val="1000"/>
-              </a:spcAft>
-              <a:defRPr sz="1700">
-                <a:solidFill>
-                  <a:srgbClr val="1D2735"/>
-                </a:solidFill>
-                <a:latin typeface="Aptos"/>
+                <a:spcPts val="1200"/>
+              </a:spcAft>
+              <a:defRPr sz="1800">
+                <a:solidFill>
+                  <a:srgbClr val="1C2634"/>
+                </a:solidFill>
+                <a:latin typeface="Helvetica Neue"/>
               </a:defRPr>
             </a:pPr>
             <a:r>
-              <a:t>No claim about hidden reasoning.</a:t>
+              <a:t>B: trajectory context</a:t>
             </a:r>
           </a:p>
           <a:p>
             <a:pPr>
               <a:spcAft>
-                <a:spcPts val="1000"/>
-              </a:spcAft>
-              <a:defRPr sz="1700">
-                <a:solidFill>
-                  <a:srgbClr val="1D2735"/>
-                </a:solidFill>
-                <a:latin typeface="Aptos"/>
+                <a:spcPts val="1200"/>
+              </a:spcAft>
+              <a:defRPr sz="1800">
+                <a:solidFill>
+                  <a:srgbClr val="1C2634"/>
+                </a:solidFill>
+                <a:latin typeface="Helvetica Neue"/>
               </a:defRPr>
             </a:pPr>
             <a:r>
-              <a:t>Compares two prompt formats under the same API-Bank split.</a:t>
+              <a:t>Same base model, seed, stream order, and scoring code.</a:t>
             </a:r>
           </a:p>
         </p:txBody>
@@ -4086,8 +4088,8 @@
         </p:nvSpPr>
         <p:spPr>
           <a:xfrm>
-            <a:off x="603504" y="6437376"/>
-            <a:ext cx="2926080" cy="201168"/>
+            <a:off x="914400" y="4937760"/>
+            <a:ext cx="10149840" cy="411480"/>
           </a:xfrm>
           <a:prstGeom prst="rect">
             <a:avLst/>
@@ -4095,18 +4097,61 @@
           <a:noFill/>
         </p:spPr>
         <p:txBody>
-          <a:bodyPr wrap="none" lIns="36576" rIns="36576" tIns="18288" bIns="18288" anchor="t">
+          <a:bodyPr wrap="square" lIns="27432" rIns="27432" tIns="18288" bIns="18288" anchor="t">
             <a:spAutoFit/>
           </a:bodyPr>
           <a:lstStyle/>
           <a:p>
-            <a:pPr algn="l"/>
-            <a:r>
-              <a:rPr sz="800" b="0">
-                <a:solidFill>
-                  <a:srgbClr val="5E6C84"/>
-                </a:solidFill>
-                <a:latin typeface="Aptos"/>
+            <a:pPr algn="ctr">
+              <a:spcAft>
+                <a:spcPts val="300"/>
+              </a:spcAft>
+            </a:pPr>
+            <a:r>
+              <a:rPr sz="2000" b="1">
+                <a:solidFill>
+                  <a:srgbClr val="1C2634"/>
+                </a:solidFill>
+                <a:latin typeface="Helvetica Neue"/>
+              </a:rPr>
+              <a:t>The question is whether keeping the trace changes continual next-call learning.</a:t>
+            </a:r>
+          </a:p>
+        </p:txBody>
+      </p:sp>
+      <p:sp>
+        <p:nvSpPr>
+          <p:cNvPr id="10" name="TextBox 9"/>
+          <p:cNvSpPr txBox="1"/>
+          <p:nvPr/>
+        </p:nvSpPr>
+        <p:spPr>
+          <a:xfrm>
+            <a:off x="658368" y="6464808"/>
+            <a:ext cx="2743200" cy="164592"/>
+          </a:xfrm>
+          <a:prstGeom prst="rect">
+            <a:avLst/>
+          </a:prstGeom>
+          <a:noFill/>
+        </p:spPr>
+        <p:txBody>
+          <a:bodyPr wrap="square" lIns="27432" rIns="27432" tIns="18288" bIns="18288" anchor="t">
+            <a:spAutoFit/>
+          </a:bodyPr>
+          <a:lstStyle/>
+          <a:p>
+            <a:pPr algn="l">
+              <a:spcAft>
+                <a:spcPts val="300"/>
+              </a:spcAft>
+            </a:pPr>
+            <a:r>
+              <a:rPr sz="700" b="0">
+                <a:solidFill>
+                  <a:srgbClr val="596880"/>
+                </a:solidFill>
+                <a:latin typeface="Helvetica Neue"/>
               </a:rPr>
               <a:t>CS 590NN Final Project</a:t>
             </a:r>
@@ -4115,14 +4160,14 @@
       </p:sp>
       <p:sp>
         <p:nvSpPr>
-          <p:cNvPr id="10" name="TextBox 9"/>
+          <p:cNvPr id="11" name="TextBox 10"/>
           <p:cNvSpPr txBox="1"/>
           <p:nvPr/>
         </p:nvSpPr>
         <p:spPr>
           <a:xfrm>
-            <a:off x="11247120" y="6437376"/>
-            <a:ext cx="320040" cy="201168"/>
+            <a:off x="11320272" y="6464808"/>
+            <a:ext cx="228600" cy="164592"/>
           </a:xfrm>
           <a:prstGeom prst="rect">
             <a:avLst/>
@@ -4130,18 +4175,22 @@
           <a:noFill/>
         </p:spPr>
         <p:txBody>
-          <a:bodyPr wrap="none" lIns="36576" rIns="36576" tIns="18288" bIns="18288" anchor="t">
+          <a:bodyPr wrap="square" lIns="27432" rIns="27432" tIns="18288" bIns="18288" anchor="t">
             <a:spAutoFit/>
           </a:bodyPr>
           <a:lstStyle/>
           <a:p>
-            <a:pPr algn="r"/>
-            <a:r>
-              <a:rPr sz="800" b="0">
-                <a:solidFill>
-                  <a:srgbClr val="5E6C84"/>
-                </a:solidFill>
-                <a:latin typeface="Aptos"/>
+            <a:pPr algn="r">
+              <a:spcAft>
+                <a:spcPts val="300"/>
+              </a:spcAft>
+            </a:pPr>
+            <a:r>
+              <a:rPr sz="700" b="0">
+                <a:solidFill>
+                  <a:srgbClr val="596880"/>
+                </a:solidFill>
+                <a:latin typeface="Helvetica Neue"/>
               </a:rPr>
               <a:t>2</a:t>
             </a:r>
@@ -4174,8 +4223,8 @@
         </p:nvSpPr>
         <p:spPr>
           <a:xfrm>
-            <a:off x="594360" y="329184"/>
-            <a:ext cx="9875520" cy="530352"/>
+            <a:off x="658368" y="347472"/>
+            <a:ext cx="10789920" cy="393192"/>
           </a:xfrm>
           <a:prstGeom prst="rect">
             <a:avLst/>
@@ -4183,18 +4232,22 @@
           <a:noFill/>
         </p:spPr>
         <p:txBody>
-          <a:bodyPr wrap="none" lIns="36576" rIns="36576" tIns="18288" bIns="18288" anchor="t">
+          <a:bodyPr wrap="square" lIns="27432" rIns="27432" tIns="18288" bIns="18288" anchor="t">
             <a:spAutoFit/>
           </a:bodyPr>
           <a:lstStyle/>
           <a:p>
-            <a:pPr algn="l"/>
-            <a:r>
-              <a:rPr sz="2900" b="1">
-                <a:solidFill>
-                  <a:srgbClr val="1D2735"/>
-                </a:solidFill>
-                <a:latin typeface="Aptos"/>
+            <a:pPr algn="l">
+              <a:spcAft>
+                <a:spcPts val="300"/>
+              </a:spcAft>
+            </a:pPr>
+            <a:r>
+              <a:rPr sz="2500" b="1">
+                <a:solidFill>
+                  <a:srgbClr val="1C2634"/>
+                </a:solidFill>
+                <a:latin typeface="Helvetica Neue"/>
               </a:rPr>
               <a:t>Experiment Design</a:t>
             </a:r>
@@ -4209,8 +4262,8 @@
         </p:nvSpPr>
         <p:spPr>
           <a:xfrm>
-            <a:off x="621792" y="850392"/>
-            <a:ext cx="9692640" cy="310896"/>
+            <a:off x="676656" y="786384"/>
+            <a:ext cx="10424160" cy="256032"/>
           </a:xfrm>
           <a:prstGeom prst="rect">
             <a:avLst/>
@@ -4218,20 +4271,24 @@
           <a:noFill/>
         </p:spPr>
         <p:txBody>
-          <a:bodyPr wrap="none" lIns="36576" rIns="36576" tIns="18288" bIns="18288" anchor="t">
+          <a:bodyPr wrap="square" lIns="27432" rIns="27432" tIns="18288" bIns="18288" anchor="t">
             <a:spAutoFit/>
           </a:bodyPr>
           <a:lstStyle/>
           <a:p>
-            <a:pPr algn="l"/>
-            <a:r>
-              <a:rPr sz="1300" b="0">
-                <a:solidFill>
-                  <a:srgbClr val="5E6C84"/>
-                </a:solidFill>
-                <a:latin typeface="Aptos"/>
+            <a:pPr algn="l">
+              <a:spcAft>
+                <a:spcPts val="300"/>
+              </a:spcAft>
+            </a:pPr>
+            <a:r>
+              <a:rPr sz="1100" b="0">
+                <a:solidFill>
+                  <a:srgbClr val="596880"/>
+                </a:solidFill>
+                <a:latin typeface="Helvetica Neue"/>
               </a:rPr>
-              <a:t>Four sequential API-Bank blocks; evaluate all blocks after each training stage.</a:t>
+              <a:t>Train sequentially; evaluate every block after each stage.</a:t>
             </a:r>
           </a:p>
         </p:txBody>
@@ -4244,14 +4301,14 @@
         </p:nvSpPr>
         <p:spPr>
           <a:xfrm>
-            <a:off x="603504" y="1152144"/>
-            <a:ext cx="10972800" cy="18288"/>
+            <a:off x="658368" y="1078992"/>
+            <a:ext cx="10881360" cy="18288"/>
           </a:xfrm>
           <a:prstGeom prst="rect">
             <a:avLst/>
           </a:prstGeom>
           <a:solidFill>
-            <a:srgbClr val="D9DEE5"/>
+            <a:srgbClr val="D7DCE4"/>
           </a:solidFill>
           <a:ln>
             <a:noFill/>
@@ -4287,18 +4344,18 @@
         </p:nvSpPr>
         <p:spPr>
           <a:xfrm>
-            <a:off x="896112" y="1874519"/>
-            <a:ext cx="1508760" cy="804672"/>
+            <a:off x="877824" y="1901952"/>
+            <a:ext cx="1234440" cy="640080"/>
           </a:xfrm>
           <a:prstGeom prst="roundRect">
             <a:avLst/>
           </a:prstGeom>
           <a:solidFill>
-            <a:srgbClr val="FFFFFF"/>
+            <a:srgbClr val="F6F8FB"/>
           </a:solidFill>
-          <a:ln w="9525">
+          <a:ln w="10160">
             <a:solidFill>
-              <a:srgbClr val="D9DEE5"/>
+              <a:srgbClr val="D7DCE4"/>
             </a:solidFill>
           </a:ln>
         </p:spPr>
@@ -4332,8 +4389,8 @@
         </p:nvSpPr>
         <p:spPr>
           <a:xfrm>
-            <a:off x="896112" y="2029968"/>
-            <a:ext cx="1508760" cy="256032"/>
+            <a:off x="987552" y="2011680"/>
+            <a:ext cx="1014984" cy="475488"/>
           </a:xfrm>
           <a:prstGeom prst="rect">
             <a:avLst/>
@@ -4341,18 +4398,22 @@
           <a:noFill/>
         </p:spPr>
         <p:txBody>
-          <a:bodyPr wrap="none" lIns="36576" rIns="36576" tIns="18288" bIns="18288" anchor="t">
+          <a:bodyPr wrap="square" lIns="27432" rIns="27432" tIns="18288" bIns="18288" anchor="ctr">
             <a:spAutoFit/>
           </a:bodyPr>
           <a:lstStyle/>
           <a:p>
-            <a:pPr algn="ctr"/>
-            <a:r>
-              <a:rPr sz="2300" b="1">
-                <a:solidFill>
-                  <a:srgbClr val="148479"/>
-                </a:solidFill>
-                <a:latin typeface="Aptos"/>
+            <a:pPr algn="ctr">
+              <a:spcAft>
+                <a:spcPts val="300"/>
+              </a:spcAft>
+            </a:pPr>
+            <a:r>
+              <a:rPr sz="1700" b="1">
+                <a:solidFill>
+                  <a:srgbClr val="128479"/>
+                </a:solidFill>
+                <a:latin typeface="Helvetica Neue"/>
               </a:rPr>
               <a:t>D1</a:t>
             </a:r>
@@ -4367,8 +4428,8 @@
         </p:nvSpPr>
         <p:spPr>
           <a:xfrm>
-            <a:off x="896112" y="2331720"/>
-            <a:ext cx="1508760" cy="182880"/>
+            <a:off x="877824" y="2615184"/>
+            <a:ext cx="1234440" cy="164592"/>
           </a:xfrm>
           <a:prstGeom prst="rect">
             <a:avLst/>
@@ -4376,20 +4437,24 @@
           <a:noFill/>
         </p:spPr>
         <p:txBody>
-          <a:bodyPr wrap="none" lIns="36576" rIns="36576" tIns="18288" bIns="18288" anchor="t">
+          <a:bodyPr wrap="square" lIns="27432" rIns="27432" tIns="18288" bIns="18288" anchor="t">
             <a:spAutoFit/>
           </a:bodyPr>
           <a:lstStyle/>
           <a:p>
-            <a:pPr algn="ctr"/>
-            <a:r>
-              <a:rPr sz="900" b="0">
-                <a:solidFill>
-                  <a:srgbClr val="5E6C84"/>
-                </a:solidFill>
-                <a:latin typeface="Aptos"/>
+            <a:pPr algn="ctr">
+              <a:spcAft>
+                <a:spcPts val="300"/>
+              </a:spcAft>
+            </a:pPr>
+            <a:r>
+              <a:rPr sz="800" b="0">
+                <a:solidFill>
+                  <a:srgbClr val="596880"/>
+                </a:solidFill>
+                <a:latin typeface="Helvetica Neue"/>
               </a:rPr>
-              <a:t>train stage</a:t>
+              <a:t>train</a:t>
             </a:r>
           </a:p>
         </p:txBody>
@@ -4402,8 +4467,8 @@
         </p:nvSpPr>
         <p:spPr>
           <a:xfrm>
-            <a:off x="2532888" y="2048256"/>
-            <a:ext cx="411480" cy="256032"/>
+            <a:off x="2322576" y="2057400"/>
+            <a:ext cx="411480" cy="219456"/>
           </a:xfrm>
           <a:prstGeom prst="rect">
             <a:avLst/>
@@ -4411,18 +4476,22 @@
           <a:noFill/>
         </p:spPr>
         <p:txBody>
-          <a:bodyPr wrap="none" lIns="36576" rIns="36576" tIns="18288" bIns="18288" anchor="t">
+          <a:bodyPr wrap="square" lIns="27432" rIns="27432" tIns="18288" bIns="18288" anchor="t">
             <a:spAutoFit/>
           </a:bodyPr>
           <a:lstStyle/>
           <a:p>
-            <a:pPr algn="ctr"/>
-            <a:r>
-              <a:rPr sz="2500" b="1">
-                <a:solidFill>
-                  <a:srgbClr val="5E6C84"/>
-                </a:solidFill>
-                <a:latin typeface="Aptos"/>
+            <a:pPr algn="ctr">
+              <a:spcAft>
+                <a:spcPts val="300"/>
+              </a:spcAft>
+            </a:pPr>
+            <a:r>
+              <a:rPr sz="1900" b="1">
+                <a:solidFill>
+                  <a:srgbClr val="596880"/>
+                </a:solidFill>
+                <a:latin typeface="Helvetica Neue"/>
               </a:rPr>
               <a:t>&gt;</a:t>
             </a:r>
@@ -4437,18 +4506,18 @@
         </p:nvSpPr>
         <p:spPr>
           <a:xfrm>
-            <a:off x="3227832" y="1874519"/>
-            <a:ext cx="1508760" cy="804672"/>
+            <a:off x="3392424" y="1901952"/>
+            <a:ext cx="1234440" cy="640080"/>
           </a:xfrm>
           <a:prstGeom prst="roundRect">
             <a:avLst/>
           </a:prstGeom>
           <a:solidFill>
-            <a:srgbClr val="FFFFFF"/>
+            <a:srgbClr val="F6F8FB"/>
           </a:solidFill>
-          <a:ln w="9525">
+          <a:ln w="10160">
             <a:solidFill>
-              <a:srgbClr val="D9DEE5"/>
+              <a:srgbClr val="D7DCE4"/>
             </a:solidFill>
           </a:ln>
         </p:spPr>
@@ -4482,8 +4551,8 @@
         </p:nvSpPr>
         <p:spPr>
           <a:xfrm>
-            <a:off x="3227832" y="2029968"/>
-            <a:ext cx="1508760" cy="256032"/>
+            <a:off x="3502152" y="2011680"/>
+            <a:ext cx="1014984" cy="475488"/>
           </a:xfrm>
           <a:prstGeom prst="rect">
             <a:avLst/>
@@ -4491,18 +4560,22 @@
           <a:noFill/>
         </p:spPr>
         <p:txBody>
-          <a:bodyPr wrap="none" lIns="36576" rIns="36576" tIns="18288" bIns="18288" anchor="t">
+          <a:bodyPr wrap="square" lIns="27432" rIns="27432" tIns="18288" bIns="18288" anchor="ctr">
             <a:spAutoFit/>
           </a:bodyPr>
           <a:lstStyle/>
           <a:p>
-            <a:pPr algn="ctr"/>
-            <a:r>
-              <a:rPr sz="2300" b="1">
-                <a:solidFill>
-                  <a:srgbClr val="148479"/>
-                </a:solidFill>
-                <a:latin typeface="Aptos"/>
+            <a:pPr algn="ctr">
+              <a:spcAft>
+                <a:spcPts val="300"/>
+              </a:spcAft>
+            </a:pPr>
+            <a:r>
+              <a:rPr sz="1700" b="1">
+                <a:solidFill>
+                  <a:srgbClr val="128479"/>
+                </a:solidFill>
+                <a:latin typeface="Helvetica Neue"/>
               </a:rPr>
               <a:t>D2</a:t>
             </a:r>
@@ -4517,8 +4590,8 @@
         </p:nvSpPr>
         <p:spPr>
           <a:xfrm>
-            <a:off x="3227832" y="2331720"/>
-            <a:ext cx="1508760" cy="182880"/>
+            <a:off x="3392424" y="2615184"/>
+            <a:ext cx="1234440" cy="164592"/>
           </a:xfrm>
           <a:prstGeom prst="rect">
             <a:avLst/>
@@ -4526,20 +4599,24 @@
           <a:noFill/>
         </p:spPr>
         <p:txBody>
-          <a:bodyPr wrap="none" lIns="36576" rIns="36576" tIns="18288" bIns="18288" anchor="t">
+          <a:bodyPr wrap="square" lIns="27432" rIns="27432" tIns="18288" bIns="18288" anchor="t">
             <a:spAutoFit/>
           </a:bodyPr>
           <a:lstStyle/>
           <a:p>
-            <a:pPr algn="ctr"/>
-            <a:r>
-              <a:rPr sz="900" b="0">
-                <a:solidFill>
-                  <a:srgbClr val="5E6C84"/>
-                </a:solidFill>
-                <a:latin typeface="Aptos"/>
+            <a:pPr algn="ctr">
+              <a:spcAft>
+                <a:spcPts val="300"/>
+              </a:spcAft>
+            </a:pPr>
+            <a:r>
+              <a:rPr sz="800" b="0">
+                <a:solidFill>
+                  <a:srgbClr val="596880"/>
+                </a:solidFill>
+                <a:latin typeface="Helvetica Neue"/>
               </a:rPr>
-              <a:t>train stage</a:t>
+              <a:t>train</a:t>
             </a:r>
           </a:p>
         </p:txBody>
@@ -4552,8 +4629,8 @@
         </p:nvSpPr>
         <p:spPr>
           <a:xfrm>
-            <a:off x="4864608" y="2048256"/>
-            <a:ext cx="411480" cy="256032"/>
+            <a:off x="4837176" y="2057400"/>
+            <a:ext cx="411480" cy="219456"/>
           </a:xfrm>
           <a:prstGeom prst="rect">
             <a:avLst/>
@@ -4561,18 +4638,22 @@
           <a:noFill/>
         </p:spPr>
         <p:txBody>
-          <a:bodyPr wrap="none" lIns="36576" rIns="36576" tIns="18288" bIns="18288" anchor="t">
+          <a:bodyPr wrap="square" lIns="27432" rIns="27432" tIns="18288" bIns="18288" anchor="t">
             <a:spAutoFit/>
           </a:bodyPr>
           <a:lstStyle/>
           <a:p>
-            <a:pPr algn="ctr"/>
-            <a:r>
-              <a:rPr sz="2500" b="1">
-                <a:solidFill>
-                  <a:srgbClr val="5E6C84"/>
-                </a:solidFill>
-                <a:latin typeface="Aptos"/>
+            <a:pPr algn="ctr">
+              <a:spcAft>
+                <a:spcPts val="300"/>
+              </a:spcAft>
+            </a:pPr>
+            <a:r>
+              <a:rPr sz="1900" b="1">
+                <a:solidFill>
+                  <a:srgbClr val="596880"/>
+                </a:solidFill>
+                <a:latin typeface="Helvetica Neue"/>
               </a:rPr>
               <a:t>&gt;</a:t>
             </a:r>
@@ -4587,18 +4668,18 @@
         </p:nvSpPr>
         <p:spPr>
           <a:xfrm>
-            <a:off x="5559552" y="1874519"/>
-            <a:ext cx="1508760" cy="804672"/>
+            <a:off x="5907024" y="1901952"/>
+            <a:ext cx="1234440" cy="640080"/>
           </a:xfrm>
           <a:prstGeom prst="roundRect">
             <a:avLst/>
           </a:prstGeom>
           <a:solidFill>
-            <a:srgbClr val="FFFFFF"/>
+            <a:srgbClr val="F6F8FB"/>
           </a:solidFill>
-          <a:ln w="9525">
+          <a:ln w="10160">
             <a:solidFill>
-              <a:srgbClr val="D9DEE5"/>
+              <a:srgbClr val="D7DCE4"/>
             </a:solidFill>
           </a:ln>
         </p:spPr>
@@ -4632,8 +4713,8 @@
         </p:nvSpPr>
         <p:spPr>
           <a:xfrm>
-            <a:off x="5559552" y="2029968"/>
-            <a:ext cx="1508760" cy="256032"/>
+            <a:off x="6016752" y="2011680"/>
+            <a:ext cx="1014984" cy="475488"/>
           </a:xfrm>
           <a:prstGeom prst="rect">
             <a:avLst/>
@@ -4641,18 +4722,22 @@
           <a:noFill/>
         </p:spPr>
         <p:txBody>
-          <a:bodyPr wrap="none" lIns="36576" rIns="36576" tIns="18288" bIns="18288" anchor="t">
+          <a:bodyPr wrap="square" lIns="27432" rIns="27432" tIns="18288" bIns="18288" anchor="ctr">
             <a:spAutoFit/>
           </a:bodyPr>
           <a:lstStyle/>
           <a:p>
-            <a:pPr algn="ctr"/>
-            <a:r>
-              <a:rPr sz="2300" b="1">
-                <a:solidFill>
-                  <a:srgbClr val="148479"/>
-                </a:solidFill>
-                <a:latin typeface="Aptos"/>
+            <a:pPr algn="ctr">
+              <a:spcAft>
+                <a:spcPts val="300"/>
+              </a:spcAft>
+            </a:pPr>
+            <a:r>
+              <a:rPr sz="1700" b="1">
+                <a:solidFill>
+                  <a:srgbClr val="128479"/>
+                </a:solidFill>
+                <a:latin typeface="Helvetica Neue"/>
               </a:rPr>
               <a:t>D3</a:t>
             </a:r>
@@ -4667,8 +4752,8 @@
         </p:nvSpPr>
         <p:spPr>
           <a:xfrm>
-            <a:off x="5559552" y="2331720"/>
-            <a:ext cx="1508760" cy="182880"/>
+            <a:off x="5907024" y="2615184"/>
+            <a:ext cx="1234440" cy="164592"/>
           </a:xfrm>
           <a:prstGeom prst="rect">
             <a:avLst/>
@@ -4676,20 +4761,24 @@
           <a:noFill/>
         </p:spPr>
         <p:txBody>
-          <a:bodyPr wrap="none" lIns="36576" rIns="36576" tIns="18288" bIns="18288" anchor="t">
+          <a:bodyPr wrap="square" lIns="27432" rIns="27432" tIns="18288" bIns="18288" anchor="t">
             <a:spAutoFit/>
           </a:bodyPr>
           <a:lstStyle/>
           <a:p>
-            <a:pPr algn="ctr"/>
-            <a:r>
-              <a:rPr sz="900" b="0">
-                <a:solidFill>
-                  <a:srgbClr val="5E6C84"/>
-                </a:solidFill>
-                <a:latin typeface="Aptos"/>
+            <a:pPr algn="ctr">
+              <a:spcAft>
+                <a:spcPts val="300"/>
+              </a:spcAft>
+            </a:pPr>
+            <a:r>
+              <a:rPr sz="800" b="0">
+                <a:solidFill>
+                  <a:srgbClr val="596880"/>
+                </a:solidFill>
+                <a:latin typeface="Helvetica Neue"/>
               </a:rPr>
-              <a:t>train stage</a:t>
+              <a:t>train</a:t>
             </a:r>
           </a:p>
         </p:txBody>
@@ -4702,8 +4791,8 @@
         </p:nvSpPr>
         <p:spPr>
           <a:xfrm>
-            <a:off x="7196327" y="2048256"/>
-            <a:ext cx="411480" cy="256032"/>
+            <a:off x="7351775" y="2057400"/>
+            <a:ext cx="411480" cy="219456"/>
           </a:xfrm>
           <a:prstGeom prst="rect">
             <a:avLst/>
@@ -4711,18 +4800,22 @@
           <a:noFill/>
         </p:spPr>
         <p:txBody>
-          <a:bodyPr wrap="none" lIns="36576" rIns="36576" tIns="18288" bIns="18288" anchor="t">
+          <a:bodyPr wrap="square" lIns="27432" rIns="27432" tIns="18288" bIns="18288" anchor="t">
             <a:spAutoFit/>
           </a:bodyPr>
           <a:lstStyle/>
           <a:p>
-            <a:pPr algn="ctr"/>
-            <a:r>
-              <a:rPr sz="2500" b="1">
-                <a:solidFill>
-                  <a:srgbClr val="5E6C84"/>
-                </a:solidFill>
-                <a:latin typeface="Aptos"/>
+            <a:pPr algn="ctr">
+              <a:spcAft>
+                <a:spcPts val="300"/>
+              </a:spcAft>
+            </a:pPr>
+            <a:r>
+              <a:rPr sz="1900" b="1">
+                <a:solidFill>
+                  <a:srgbClr val="596880"/>
+                </a:solidFill>
+                <a:latin typeface="Helvetica Neue"/>
               </a:rPr>
               <a:t>&gt;</a:t>
             </a:r>
@@ -4737,18 +4830,18 @@
         </p:nvSpPr>
         <p:spPr>
           <a:xfrm>
-            <a:off x="7891271" y="1874519"/>
-            <a:ext cx="1508760" cy="804672"/>
+            <a:off x="8421624" y="1901952"/>
+            <a:ext cx="1234440" cy="640080"/>
           </a:xfrm>
           <a:prstGeom prst="roundRect">
             <a:avLst/>
           </a:prstGeom>
           <a:solidFill>
-            <a:srgbClr val="FFFFFF"/>
+            <a:srgbClr val="F6F8FB"/>
           </a:solidFill>
-          <a:ln w="9525">
+          <a:ln w="10160">
             <a:solidFill>
-              <a:srgbClr val="D9DEE5"/>
+              <a:srgbClr val="D7DCE4"/>
             </a:solidFill>
           </a:ln>
         </p:spPr>
@@ -4782,8 +4875,8 @@
         </p:nvSpPr>
         <p:spPr>
           <a:xfrm>
-            <a:off x="7891271" y="2029968"/>
-            <a:ext cx="1508760" cy="256032"/>
+            <a:off x="8531352" y="2011680"/>
+            <a:ext cx="1014984" cy="475488"/>
           </a:xfrm>
           <a:prstGeom prst="rect">
             <a:avLst/>
@@ -4791,18 +4884,22 @@
           <a:noFill/>
         </p:spPr>
         <p:txBody>
-          <a:bodyPr wrap="none" lIns="36576" rIns="36576" tIns="18288" bIns="18288" anchor="t">
+          <a:bodyPr wrap="square" lIns="27432" rIns="27432" tIns="18288" bIns="18288" anchor="ctr">
             <a:spAutoFit/>
           </a:bodyPr>
           <a:lstStyle/>
           <a:p>
-            <a:pPr algn="ctr"/>
-            <a:r>
-              <a:rPr sz="2300" b="1">
-                <a:solidFill>
-                  <a:srgbClr val="148479"/>
-                </a:solidFill>
-                <a:latin typeface="Aptos"/>
+            <a:pPr algn="ctr">
+              <a:spcAft>
+                <a:spcPts val="300"/>
+              </a:spcAft>
+            </a:pPr>
+            <a:r>
+              <a:rPr sz="1700" b="1">
+                <a:solidFill>
+                  <a:srgbClr val="128479"/>
+                </a:solidFill>
+                <a:latin typeface="Helvetica Neue"/>
               </a:rPr>
               <a:t>D4</a:t>
             </a:r>
@@ -4817,8 +4914,8 @@
         </p:nvSpPr>
         <p:spPr>
           <a:xfrm>
-            <a:off x="7891271" y="2331720"/>
-            <a:ext cx="1508760" cy="182880"/>
+            <a:off x="8421624" y="2615184"/>
+            <a:ext cx="1234440" cy="164592"/>
           </a:xfrm>
           <a:prstGeom prst="rect">
             <a:avLst/>
@@ -4826,20 +4923,24 @@
           <a:noFill/>
         </p:spPr>
         <p:txBody>
-          <a:bodyPr wrap="none" lIns="36576" rIns="36576" tIns="18288" bIns="18288" anchor="t">
+          <a:bodyPr wrap="square" lIns="27432" rIns="27432" tIns="18288" bIns="18288" anchor="t">
             <a:spAutoFit/>
           </a:bodyPr>
           <a:lstStyle/>
           <a:p>
-            <a:pPr algn="ctr"/>
-            <a:r>
-              <a:rPr sz="900" b="0">
-                <a:solidFill>
-                  <a:srgbClr val="5E6C84"/>
-                </a:solidFill>
-                <a:latin typeface="Aptos"/>
+            <a:pPr algn="ctr">
+              <a:spcAft>
+                <a:spcPts val="300"/>
+              </a:spcAft>
+            </a:pPr>
+            <a:r>
+              <a:rPr sz="800" b="0">
+                <a:solidFill>
+                  <a:srgbClr val="596880"/>
+                </a:solidFill>
+                <a:latin typeface="Helvetica Neue"/>
               </a:rPr>
-              <a:t>train stage</a:t>
+              <a:t>train</a:t>
             </a:r>
           </a:p>
         </p:txBody>
@@ -4852,8 +4953,8 @@
         </p:nvSpPr>
         <p:spPr>
           <a:xfrm>
-            <a:off x="1051560" y="2962656"/>
-            <a:ext cx="8869680" cy="329184"/>
+            <a:off x="1051560" y="3310128"/>
+            <a:ext cx="9784080" cy="310896"/>
           </a:xfrm>
           <a:prstGeom prst="rect">
             <a:avLst/>
@@ -4861,45 +4962,47 @@
           <a:noFill/>
         </p:spPr>
         <p:txBody>
-          <a:bodyPr wrap="none" lIns="36576" rIns="36576" tIns="18288" bIns="18288" anchor="t">
+          <a:bodyPr wrap="square" lIns="27432" rIns="27432" tIns="18288" bIns="18288" anchor="t">
             <a:spAutoFit/>
           </a:bodyPr>
           <a:lstStyle/>
           <a:p>
-            <a:pPr algn="ctr"/>
-            <a:r>
-              <a:rPr sz="2100" b="1">
-                <a:solidFill>
-                  <a:srgbClr val="1D2735"/>
-                </a:solidFill>
-                <a:latin typeface="Aptos"/>
+            <a:pPr algn="ctr">
+              <a:spcAft>
+                <a:spcPts val="300"/>
+              </a:spcAft>
+            </a:pPr>
+            <a:r>
+              <a:rPr sz="2000" b="1">
+                <a:solidFill>
+                  <a:srgbClr val="1C2634"/>
+                </a:solidFill>
+                <a:latin typeface="Helvetica Neue"/>
               </a:rPr>
-              <a:t>After each stage: score D1-D4</a:t>
-            </a:r>
-          </a:p>
-        </p:txBody>
-      </p:sp>
-      <p:sp>
-        <p:nvSpPr>
-          <p:cNvPr id="21" name="Rounded Rectangle 20"/>
+              <a:t>After each training stage: score D1, D2, D3, and D4</a:t>
+            </a:r>
+          </a:p>
+        </p:txBody>
+      </p:sp>
+      <p:sp>
+        <p:nvSpPr>
+          <p:cNvPr id="21" name="Rectangle 20"/>
           <p:cNvSpPr/>
           <p:nvPr/>
         </p:nvSpPr>
         <p:spPr>
           <a:xfrm>
-            <a:off x="786384" y="3858768"/>
-            <a:ext cx="5074920" cy="1234440"/>
-          </a:xfrm>
-          <a:prstGeom prst="roundRect">
+            <a:off x="658368" y="3977639"/>
+            <a:ext cx="10881360" cy="18288"/>
+          </a:xfrm>
+          <a:prstGeom prst="rect">
             <a:avLst/>
           </a:prstGeom>
           <a:solidFill>
-            <a:srgbClr val="FFFFFF"/>
+            <a:srgbClr val="D7DCE4"/>
           </a:solidFill>
-          <a:ln w="9525">
-            <a:solidFill>
-              <a:srgbClr val="D9DEE5"/>
-            </a:solidFill>
+          <a:ln>
+            <a:noFill/>
           </a:ln>
         </p:spPr>
         <p:style>
@@ -4932,8 +5035,8 @@
         </p:nvSpPr>
         <p:spPr>
           <a:xfrm>
-            <a:off x="1060704" y="4096512"/>
-            <a:ext cx="1554480" cy="256032"/>
+            <a:off x="960120" y="4590288"/>
+            <a:ext cx="1828800" cy="274320"/>
           </a:xfrm>
           <a:prstGeom prst="rect">
             <a:avLst/>
@@ -4941,18 +5044,22 @@
           <a:noFill/>
         </p:spPr>
         <p:txBody>
-          <a:bodyPr wrap="none" lIns="36576" rIns="36576" tIns="18288" bIns="18288" anchor="t">
+          <a:bodyPr wrap="square" lIns="27432" rIns="27432" tIns="18288" bIns="18288" anchor="t">
             <a:spAutoFit/>
           </a:bodyPr>
           <a:lstStyle/>
           <a:p>
-            <a:pPr algn="l"/>
-            <a:r>
-              <a:rPr sz="1900" b="1">
-                <a:solidFill>
-                  <a:srgbClr val="B94846"/>
-                </a:solidFill>
-                <a:latin typeface="Aptos"/>
+            <a:pPr algn="l">
+              <a:spcAft>
+                <a:spcPts val="300"/>
+              </a:spcAft>
+            </a:pPr>
+            <a:r>
+              <a:rPr sz="2000" b="1">
+                <a:solidFill>
+                  <a:srgbClr val="B54745"/>
+                </a:solidFill>
+                <a:latin typeface="Helvetica Neue"/>
               </a:rPr>
               <a:t>Condition A</a:t>
             </a:r>
@@ -4967,8 +5074,8 @@
         </p:nvSpPr>
         <p:spPr>
           <a:xfrm>
-            <a:off x="2697480" y="4114800"/>
-            <a:ext cx="2788920" cy="246888"/>
+            <a:off x="2926080" y="4626864"/>
+            <a:ext cx="3931920" cy="219456"/>
           </a:xfrm>
           <a:prstGeom prst="rect">
             <a:avLst/>
@@ -4976,18 +5083,22 @@
           <a:noFill/>
         </p:spPr>
         <p:txBody>
-          <a:bodyPr wrap="none" lIns="36576" rIns="36576" tIns="18288" bIns="18288" anchor="t">
+          <a:bodyPr wrap="square" lIns="27432" rIns="27432" tIns="18288" bIns="18288" anchor="t">
             <a:spAutoFit/>
           </a:bodyPr>
           <a:lstStyle/>
           <a:p>
-            <a:pPr algn="l"/>
-            <a:r>
-              <a:rPr sz="1600" b="0">
-                <a:solidFill>
-                  <a:srgbClr val="1D2735"/>
-                </a:solidFill>
-                <a:latin typeface="Aptos"/>
+            <a:pPr algn="l">
+              <a:spcAft>
+                <a:spcPts val="300"/>
+              </a:spcAft>
+            </a:pPr>
+            <a:r>
+              <a:rPr sz="1500" b="0">
+                <a:solidFill>
+                  <a:srgbClr val="1C2634"/>
+                </a:solidFill>
+                <a:latin typeface="Helvetica Neue"/>
               </a:rPr>
               <a:t>Stripped-context next-API-call baseline.</a:t>
             </a:r>
@@ -4996,46 +5107,40 @@
       </p:sp>
       <p:sp>
         <p:nvSpPr>
-          <p:cNvPr id="24" name="Rounded Rectangle 23"/>
-          <p:cNvSpPr/>
-          <p:nvPr/>
-        </p:nvSpPr>
-        <p:spPr>
-          <a:xfrm>
-            <a:off x="6327648" y="3858768"/>
-            <a:ext cx="5074920" cy="1234440"/>
-          </a:xfrm>
-          <a:prstGeom prst="roundRect">
-            <a:avLst/>
-          </a:prstGeom>
-          <a:solidFill>
-            <a:srgbClr val="FFFFFF"/>
-          </a:solidFill>
-          <a:ln w="9525">
-            <a:solidFill>
-              <a:srgbClr val="D9DEE5"/>
-            </a:solidFill>
-          </a:ln>
-        </p:spPr>
-        <p:style>
-          <a:lnRef idx="1">
-            <a:schemeClr val="accent1"/>
-          </a:lnRef>
-          <a:fillRef idx="3">
-            <a:schemeClr val="accent1"/>
-          </a:fillRef>
-          <a:effectRef idx="2">
-            <a:schemeClr val="accent1"/>
-          </a:effectRef>
-          <a:fontRef idx="minor">
-            <a:schemeClr val="lt1"/>
-          </a:fontRef>
-        </p:style>
-        <p:txBody>
-          <a:bodyPr rtlCol="0" anchor="ctr"/>
-          <a:lstStyle/>
-          <a:p>
-            <a:pPr algn="ctr"/>
+          <p:cNvPr id="24" name="TextBox 23"/>
+          <p:cNvSpPr txBox="1"/>
+          <p:nvPr/>
+        </p:nvSpPr>
+        <p:spPr>
+          <a:xfrm>
+            <a:off x="960120" y="5230368"/>
+            <a:ext cx="1828800" cy="274320"/>
+          </a:xfrm>
+          <a:prstGeom prst="rect">
+            <a:avLst/>
+          </a:prstGeom>
+          <a:noFill/>
+        </p:spPr>
+        <p:txBody>
+          <a:bodyPr wrap="square" lIns="27432" rIns="27432" tIns="18288" bIns="18288" anchor="t">
+            <a:spAutoFit/>
+          </a:bodyPr>
+          <a:lstStyle/>
+          <a:p>
+            <a:pPr algn="l">
+              <a:spcAft>
+                <a:spcPts val="300"/>
+              </a:spcAft>
+            </a:pPr>
+            <a:r>
+              <a:rPr sz="2000" b="1">
+                <a:solidFill>
+                  <a:srgbClr val="128479"/>
+                </a:solidFill>
+                <a:latin typeface="Helvetica Neue"/>
+              </a:rPr>
+              <a:t>Condition B</a:t>
+            </a:r>
           </a:p>
         </p:txBody>
       </p:sp>
@@ -5047,8 +5152,8 @@
         </p:nvSpPr>
         <p:spPr>
           <a:xfrm>
-            <a:off x="6601968" y="4096512"/>
-            <a:ext cx="1645920" cy="256032"/>
+            <a:off x="2926080" y="5266944"/>
+            <a:ext cx="4114800" cy="219456"/>
           </a:xfrm>
           <a:prstGeom prst="rect">
             <a:avLst/>
@@ -5056,20 +5161,24 @@
           <a:noFill/>
         </p:spPr>
         <p:txBody>
-          <a:bodyPr wrap="none" lIns="36576" rIns="36576" tIns="18288" bIns="18288" anchor="t">
+          <a:bodyPr wrap="square" lIns="27432" rIns="27432" tIns="18288" bIns="18288" anchor="t">
             <a:spAutoFit/>
           </a:bodyPr>
           <a:lstStyle/>
           <a:p>
-            <a:pPr algn="l"/>
-            <a:r>
-              <a:rPr sz="1900" b="1">
-                <a:solidFill>
-                  <a:srgbClr val="148479"/>
-                </a:solidFill>
-                <a:latin typeface="Aptos"/>
+            <a:pPr algn="l">
+              <a:spcAft>
+                <a:spcPts val="300"/>
+              </a:spcAft>
+            </a:pPr>
+            <a:r>
+              <a:rPr sz="1500" b="0">
+                <a:solidFill>
+                  <a:srgbClr val="1C2634"/>
+                </a:solidFill>
+                <a:latin typeface="Helvetica Neue"/>
               </a:rPr>
-              <a:t>Condition B</a:t>
+              <a:t>Trajectory-context next-API-call format.</a:t>
             </a:r>
           </a:p>
         </p:txBody>
@@ -5082,8 +5191,8 @@
         </p:nvSpPr>
         <p:spPr>
           <a:xfrm>
-            <a:off x="8284464" y="4114800"/>
-            <a:ext cx="2697480" cy="246888"/>
+            <a:off x="658368" y="6464808"/>
+            <a:ext cx="2743200" cy="164592"/>
           </a:xfrm>
           <a:prstGeom prst="rect">
             <a:avLst/>
@@ -5091,20 +5200,24 @@
           <a:noFill/>
         </p:spPr>
         <p:txBody>
-          <a:bodyPr wrap="none" lIns="36576" rIns="36576" tIns="18288" bIns="18288" anchor="t">
+          <a:bodyPr wrap="square" lIns="27432" rIns="27432" tIns="18288" bIns="18288" anchor="t">
             <a:spAutoFit/>
           </a:bodyPr>
           <a:lstStyle/>
           <a:p>
-            <a:pPr algn="l"/>
-            <a:r>
-              <a:rPr sz="1600" b="0">
-                <a:solidFill>
-                  <a:srgbClr val="1D2735"/>
-                </a:solidFill>
-                <a:latin typeface="Aptos"/>
+            <a:pPr algn="l">
+              <a:spcAft>
+                <a:spcPts val="300"/>
+              </a:spcAft>
+            </a:pPr>
+            <a:r>
+              <a:rPr sz="700" b="0">
+                <a:solidFill>
+                  <a:srgbClr val="596880"/>
+                </a:solidFill>
+                <a:latin typeface="Helvetica Neue"/>
               </a:rPr>
-              <a:t>Trajectory-context next-API-call format.</a:t>
+              <a:t>CS 590NN Final Project</a:t>
             </a:r>
           </a:p>
         </p:txBody>
@@ -5117,8 +5230,8 @@
         </p:nvSpPr>
         <p:spPr>
           <a:xfrm>
-            <a:off x="603504" y="6437376"/>
-            <a:ext cx="2926080" cy="201168"/>
+            <a:off x="11320272" y="6464808"/>
+            <a:ext cx="228600" cy="164592"/>
           </a:xfrm>
           <a:prstGeom prst="rect">
             <a:avLst/>
@@ -5126,53 +5239,22 @@
           <a:noFill/>
         </p:spPr>
         <p:txBody>
-          <a:bodyPr wrap="none" lIns="36576" rIns="36576" tIns="18288" bIns="18288" anchor="t">
+          <a:bodyPr wrap="square" lIns="27432" rIns="27432" tIns="18288" bIns="18288" anchor="t">
             <a:spAutoFit/>
           </a:bodyPr>
           <a:lstStyle/>
           <a:p>
-            <a:pPr algn="l"/>
-            <a:r>
-              <a:rPr sz="800" b="0">
-                <a:solidFill>
-                  <a:srgbClr val="5E6C84"/>
-                </a:solidFill>
-                <a:latin typeface="Aptos"/>
-              </a:rPr>
-              <a:t>CS 590NN Final Project</a:t>
-            </a:r>
-          </a:p>
-        </p:txBody>
-      </p:sp>
-      <p:sp>
-        <p:nvSpPr>
-          <p:cNvPr id="28" name="TextBox 27"/>
-          <p:cNvSpPr txBox="1"/>
-          <p:nvPr/>
-        </p:nvSpPr>
-        <p:spPr>
-          <a:xfrm>
-            <a:off x="11247120" y="6437376"/>
-            <a:ext cx="320040" cy="201168"/>
-          </a:xfrm>
-          <a:prstGeom prst="rect">
-            <a:avLst/>
-          </a:prstGeom>
-          <a:noFill/>
-        </p:spPr>
-        <p:txBody>
-          <a:bodyPr wrap="none" lIns="36576" rIns="36576" tIns="18288" bIns="18288" anchor="t">
-            <a:spAutoFit/>
-          </a:bodyPr>
-          <a:lstStyle/>
-          <a:p>
-            <a:pPr algn="r"/>
-            <a:r>
-              <a:rPr sz="800" b="0">
-                <a:solidFill>
-                  <a:srgbClr val="5E6C84"/>
-                </a:solidFill>
-                <a:latin typeface="Aptos"/>
+            <a:pPr algn="r">
+              <a:spcAft>
+                <a:spcPts val="300"/>
+              </a:spcAft>
+            </a:pPr>
+            <a:r>
+              <a:rPr sz="700" b="0">
+                <a:solidFill>
+                  <a:srgbClr val="596880"/>
+                </a:solidFill>
+                <a:latin typeface="Helvetica Neue"/>
               </a:rPr>
               <a:t>3</a:t>
             </a:r>
@@ -5205,8 +5287,8 @@
         </p:nvSpPr>
         <p:spPr>
           <a:xfrm>
-            <a:off x="594360" y="329184"/>
-            <a:ext cx="9875520" cy="530352"/>
+            <a:off x="658368" y="347472"/>
+            <a:ext cx="10789920" cy="393192"/>
           </a:xfrm>
           <a:prstGeom prst="rect">
             <a:avLst/>
@@ -5214,18 +5296,22 @@
           <a:noFill/>
         </p:spPr>
         <p:txBody>
-          <a:bodyPr wrap="none" lIns="36576" rIns="36576" tIns="18288" bIns="18288" anchor="t">
+          <a:bodyPr wrap="square" lIns="27432" rIns="27432" tIns="18288" bIns="18288" anchor="t">
             <a:spAutoFit/>
           </a:bodyPr>
           <a:lstStyle/>
           <a:p>
-            <a:pPr algn="l"/>
-            <a:r>
-              <a:rPr sz="2900" b="1">
-                <a:solidFill>
-                  <a:srgbClr val="1D2735"/>
-                </a:solidFill>
-                <a:latin typeface="Aptos"/>
+            <a:pPr algn="l">
+              <a:spcAft>
+                <a:spcPts val="300"/>
+              </a:spcAft>
+            </a:pPr>
+            <a:r>
+              <a:rPr sz="2500" b="1">
+                <a:solidFill>
+                  <a:srgbClr val="1C2634"/>
+                </a:solidFill>
+                <a:latin typeface="Helvetica Neue"/>
               </a:rPr>
               <a:t>Setup</a:t>
             </a:r>
@@ -5240,8 +5326,8 @@
         </p:nvSpPr>
         <p:spPr>
           <a:xfrm>
-            <a:off x="621792" y="850392"/>
-            <a:ext cx="9692640" cy="310896"/>
+            <a:off x="676656" y="786384"/>
+            <a:ext cx="10424160" cy="256032"/>
           </a:xfrm>
           <a:prstGeom prst="rect">
             <a:avLst/>
@@ -5249,20 +5335,24 @@
           <a:noFill/>
         </p:spPr>
         <p:txBody>
-          <a:bodyPr wrap="none" lIns="36576" rIns="36576" tIns="18288" bIns="18288" anchor="t">
+          <a:bodyPr wrap="square" lIns="27432" rIns="27432" tIns="18288" bIns="18288" anchor="t">
             <a:spAutoFit/>
           </a:bodyPr>
           <a:lstStyle/>
           <a:p>
-            <a:pPr algn="l"/>
-            <a:r>
-              <a:rPr sz="1300" b="0">
-                <a:solidFill>
-                  <a:srgbClr val="5E6C84"/>
-                </a:solidFill>
-                <a:latin typeface="Aptos"/>
+            <a:pPr algn="l">
+              <a:spcAft>
+                <a:spcPts val="300"/>
+              </a:spcAft>
+            </a:pPr>
+            <a:r>
+              <a:rPr sz="1100" b="0">
+                <a:solidFill>
+                  <a:srgbClr val="596880"/>
+                </a:solidFill>
+                <a:latin typeface="Helvetica Neue"/>
               </a:rPr>
-              <a:t>Same base model and scoring pipeline; B sees more prompt tokens.</a:t>
+              <a:t>Same model and scoring pipeline; B sees more prompt tokens.</a:t>
             </a:r>
           </a:p>
         </p:txBody>
@@ -5275,14 +5365,14 @@
         </p:nvSpPr>
         <p:spPr>
           <a:xfrm>
-            <a:off x="603504" y="1152144"/>
-            <a:ext cx="10972800" cy="18288"/>
+            <a:off x="658368" y="1078992"/>
+            <a:ext cx="10881360" cy="18288"/>
           </a:xfrm>
           <a:prstGeom prst="rect">
             <a:avLst/>
           </a:prstGeom>
           <a:solidFill>
-            <a:srgbClr val="D9DEE5"/>
+            <a:srgbClr val="D7DCE4"/>
           </a:solidFill>
           <a:ln>
             <a:noFill/>
@@ -5319,8 +5409,8 @@
           <p:nvPr/>
         </p:nvGraphicFramePr>
         <p:xfrm>
-          <a:off x="786384" y="1481328"/>
-          <a:ext cx="5486399" cy="3383280"/>
+          <a:off x="914400" y="1417320"/>
+          <a:ext cx="6537960" cy="3127248"/>
         </p:xfrm>
         <a:graphic>
           <a:graphicData uri="http://schemas.openxmlformats.org/drawingml/2006/table">
@@ -5329,21 +5419,21 @@
                 <a:tableStyleId>{5C22544A-7EE6-4342-B048-85BDC9FD1C3A}</a:tableStyleId>
               </a:tblPr>
               <a:tblGrid>
-                <a:gridCol w="1874519"/>
-                <a:gridCol w="3611880"/>
+                <a:gridCol w="1965960"/>
+                <a:gridCol w="4572000"/>
               </a:tblGrid>
-              <a:tr h="483325">
+              <a:tr h="446749">
                 <a:tc>
                   <a:txBody>
                     <a:bodyPr/>
                     <a:lstStyle/>
                     <a:p>
                       <a:pPr>
-                        <a:defRPr sz="1100" b="1">
+                        <a:defRPr sz="1000" b="1">
                           <a:solidFill>
                             <a:srgbClr val="FFFFFF"/>
                           </a:solidFill>
-                          <a:latin typeface="Aptos"/>
+                          <a:latin typeface="Helvetica Neue"/>
                         </a:defRPr>
                       </a:pPr>
                       <a:r>
@@ -5351,9 +5441,9 @@
                       </a:r>
                     </a:p>
                   </a:txBody>
-                  <a:tcPr marL="45720" marR="45720" marT="27432" marB="27432">
+                  <a:tcPr marL="54864" marR="54864" marT="27432" marB="27432">
                     <a:solidFill>
-                      <a:srgbClr val="1D2735"/>
+                      <a:srgbClr val="1C2634"/>
                     </a:solidFill>
                   </a:tcPr>
                 </a:tc>
@@ -5363,11 +5453,11 @@
                     <a:lstStyle/>
                     <a:p>
                       <a:pPr>
-                        <a:defRPr sz="1100" b="1">
+                        <a:defRPr sz="1000" b="1">
                           <a:solidFill>
                             <a:srgbClr val="FFFFFF"/>
                           </a:solidFill>
-                          <a:latin typeface="Aptos"/>
+                          <a:latin typeface="Helvetica Neue"/>
                         </a:defRPr>
                       </a:pPr>
                       <a:r>
@@ -5375,25 +5465,25 @@
                       </a:r>
                     </a:p>
                   </a:txBody>
-                  <a:tcPr marL="45720" marR="45720" marT="27432" marB="27432">
+                  <a:tcPr marL="54864" marR="54864" marT="27432" marB="27432">
                     <a:solidFill>
-                      <a:srgbClr val="1D2735"/>
+                      <a:srgbClr val="1C2634"/>
                     </a:solidFill>
                   </a:tcPr>
                 </a:tc>
               </a:tr>
-              <a:tr h="483325">
+              <a:tr h="446749">
                 <a:tc>
                   <a:txBody>
                     <a:bodyPr/>
                     <a:lstStyle/>
                     <a:p>
                       <a:pPr>
-                        <a:defRPr sz="1200" b="0">
+                        <a:defRPr sz="1100" b="0">
                           <a:solidFill>
-                            <a:srgbClr val="1D2735"/>
+                            <a:srgbClr val="1C2634"/>
                           </a:solidFill>
-                          <a:latin typeface="Aptos"/>
+                          <a:latin typeface="Helvetica Neue"/>
                         </a:defRPr>
                       </a:pPr>
                       <a:r>
@@ -5401,9 +5491,9 @@
                       </a:r>
                     </a:p>
                   </a:txBody>
-                  <a:tcPr marL="45720" marR="45720" marT="27432" marB="27432">
+                  <a:tcPr marL="54864" marR="54864" marT="27432" marB="27432">
                     <a:solidFill>
-                      <a:srgbClr val="F6F8FA"/>
+                      <a:srgbClr val="F6F8FB"/>
                     </a:solidFill>
                   </a:tcPr>
                 </a:tc>
@@ -5413,11 +5503,11 @@
                     <a:lstStyle/>
                     <a:p>
                       <a:pPr>
-                        <a:defRPr sz="1200" b="0">
+                        <a:defRPr sz="1100" b="0">
                           <a:solidFill>
-                            <a:srgbClr val="1D2735"/>
+                            <a:srgbClr val="1C2634"/>
                           </a:solidFill>
-                          <a:latin typeface="Aptos"/>
+                          <a:latin typeface="Helvetica Neue"/>
                         </a:defRPr>
                       </a:pPr>
                       <a:r>
@@ -5425,25 +5515,25 @@
                       </a:r>
                     </a:p>
                   </a:txBody>
-                  <a:tcPr marL="45720" marR="45720" marT="27432" marB="27432">
+                  <a:tcPr marL="54864" marR="54864" marT="27432" marB="27432">
                     <a:solidFill>
-                      <a:srgbClr val="F6F8FA"/>
+                      <a:srgbClr val="F6F8FB"/>
                     </a:solidFill>
                   </a:tcPr>
                 </a:tc>
               </a:tr>
-              <a:tr h="483325">
+              <a:tr h="446749">
                 <a:tc>
                   <a:txBody>
                     <a:bodyPr/>
                     <a:lstStyle/>
                     <a:p>
                       <a:pPr>
-                        <a:defRPr sz="1200" b="0">
+                        <a:defRPr sz="1100" b="0">
                           <a:solidFill>
-                            <a:srgbClr val="1D2735"/>
+                            <a:srgbClr val="1C2634"/>
                           </a:solidFill>
-                          <a:latin typeface="Aptos"/>
+                          <a:latin typeface="Helvetica Neue"/>
                         </a:defRPr>
                       </a:pPr>
                       <a:r>
@@ -5451,7 +5541,7 @@
                       </a:r>
                     </a:p>
                   </a:txBody>
-                  <a:tcPr marL="45720" marR="45720" marT="27432" marB="27432">
+                  <a:tcPr marL="54864" marR="54864" marT="27432" marB="27432">
                     <a:solidFill>
                       <a:srgbClr val="FFFFFF"/>
                     </a:solidFill>
@@ -5463,11 +5553,11 @@
                     <a:lstStyle/>
                     <a:p>
                       <a:pPr>
-                        <a:defRPr sz="1200" b="0">
+                        <a:defRPr sz="1100" b="0">
                           <a:solidFill>
-                            <a:srgbClr val="1D2735"/>
+                            <a:srgbClr val="1C2634"/>
                           </a:solidFill>
-                          <a:latin typeface="Aptos"/>
+                          <a:latin typeface="Helvetica Neue"/>
                         </a:defRPr>
                       </a:pPr>
                       <a:r>
@@ -5475,25 +5565,25 @@
                       </a:r>
                     </a:p>
                   </a:txBody>
-                  <a:tcPr marL="45720" marR="45720" marT="27432" marB="27432">
+                  <a:tcPr marL="54864" marR="54864" marT="27432" marB="27432">
                     <a:solidFill>
                       <a:srgbClr val="FFFFFF"/>
                     </a:solidFill>
                   </a:tcPr>
                 </a:tc>
               </a:tr>
-              <a:tr h="483325">
+              <a:tr h="446749">
                 <a:tc>
                   <a:txBody>
                     <a:bodyPr/>
                     <a:lstStyle/>
                     <a:p>
                       <a:pPr>
-                        <a:defRPr sz="1200" b="0">
+                        <a:defRPr sz="1100" b="0">
                           <a:solidFill>
-                            <a:srgbClr val="1D2735"/>
+                            <a:srgbClr val="1C2634"/>
                           </a:solidFill>
-                          <a:latin typeface="Aptos"/>
+                          <a:latin typeface="Helvetica Neue"/>
                         </a:defRPr>
                       </a:pPr>
                       <a:r>
@@ -5501,9 +5591,9 @@
                       </a:r>
                     </a:p>
                   </a:txBody>
-                  <a:tcPr marL="45720" marR="45720" marT="27432" marB="27432">
+                  <a:tcPr marL="54864" marR="54864" marT="27432" marB="27432">
                     <a:solidFill>
-                      <a:srgbClr val="F6F8FA"/>
+                      <a:srgbClr val="F6F8FB"/>
                     </a:solidFill>
                   </a:tcPr>
                 </a:tc>
@@ -5513,11 +5603,11 @@
                     <a:lstStyle/>
                     <a:p>
                       <a:pPr>
-                        <a:defRPr sz="1200" b="0">
+                        <a:defRPr sz="1100" b="0">
                           <a:solidFill>
-                            <a:srgbClr val="1D2735"/>
+                            <a:srgbClr val="1C2634"/>
                           </a:solidFill>
-                          <a:latin typeface="Aptos"/>
+                          <a:latin typeface="Helvetica Neue"/>
                         </a:defRPr>
                       </a:pPr>
                       <a:r>
@@ -5525,25 +5615,25 @@
                       </a:r>
                     </a:p>
                   </a:txBody>
-                  <a:tcPr marL="45720" marR="45720" marT="27432" marB="27432">
+                  <a:tcPr marL="54864" marR="54864" marT="27432" marB="27432">
                     <a:solidFill>
-                      <a:srgbClr val="F6F8FA"/>
+                      <a:srgbClr val="F6F8FB"/>
                     </a:solidFill>
                   </a:tcPr>
                 </a:tc>
               </a:tr>
-              <a:tr h="483325">
+              <a:tr h="446749">
                 <a:tc>
                   <a:txBody>
                     <a:bodyPr/>
                     <a:lstStyle/>
                     <a:p>
                       <a:pPr>
-                        <a:defRPr sz="1200" b="0">
+                        <a:defRPr sz="1100" b="0">
                           <a:solidFill>
-                            <a:srgbClr val="1D2735"/>
+                            <a:srgbClr val="1C2634"/>
                           </a:solidFill>
-                          <a:latin typeface="Aptos"/>
+                          <a:latin typeface="Helvetica Neue"/>
                         </a:defRPr>
                       </a:pPr>
                       <a:r>
@@ -5551,7 +5641,7 @@
                       </a:r>
                     </a:p>
                   </a:txBody>
-                  <a:tcPr marL="45720" marR="45720" marT="27432" marB="27432">
+                  <a:tcPr marL="54864" marR="54864" marT="27432" marB="27432">
                     <a:solidFill>
                       <a:srgbClr val="FFFFFF"/>
                     </a:solidFill>
@@ -5563,11 +5653,11 @@
                     <a:lstStyle/>
                     <a:p>
                       <a:pPr>
-                        <a:defRPr sz="1200" b="0">
+                        <a:defRPr sz="1100" b="0">
                           <a:solidFill>
-                            <a:srgbClr val="1D2735"/>
+                            <a:srgbClr val="1C2634"/>
                           </a:solidFill>
-                          <a:latin typeface="Aptos"/>
+                          <a:latin typeface="Helvetica Neue"/>
                         </a:defRPr>
                       </a:pPr>
                       <a:r>
@@ -5575,25 +5665,25 @@
                       </a:r>
                     </a:p>
                   </a:txBody>
-                  <a:tcPr marL="45720" marR="45720" marT="27432" marB="27432">
+                  <a:tcPr marL="54864" marR="54864" marT="27432" marB="27432">
                     <a:solidFill>
                       <a:srgbClr val="FFFFFF"/>
                     </a:solidFill>
                   </a:tcPr>
                 </a:tc>
               </a:tr>
-              <a:tr h="483325">
+              <a:tr h="446749">
                 <a:tc>
                   <a:txBody>
                     <a:bodyPr/>
                     <a:lstStyle/>
                     <a:p>
                       <a:pPr>
-                        <a:defRPr sz="1200" b="0">
+                        <a:defRPr sz="1100" b="0">
                           <a:solidFill>
-                            <a:srgbClr val="1D2735"/>
+                            <a:srgbClr val="1C2634"/>
                           </a:solidFill>
-                          <a:latin typeface="Aptos"/>
+                          <a:latin typeface="Helvetica Neue"/>
                         </a:defRPr>
                       </a:pPr>
                       <a:r>
@@ -5601,9 +5691,9 @@
                       </a:r>
                     </a:p>
                   </a:txBody>
-                  <a:tcPr marL="45720" marR="45720" marT="27432" marB="27432">
+                  <a:tcPr marL="54864" marR="54864" marT="27432" marB="27432">
                     <a:solidFill>
-                      <a:srgbClr val="F6F8FA"/>
+                      <a:srgbClr val="F6F8FB"/>
                     </a:solidFill>
                   </a:tcPr>
                 </a:tc>
@@ -5613,11 +5703,11 @@
                     <a:lstStyle/>
                     <a:p>
                       <a:pPr>
-                        <a:defRPr sz="1200" b="0">
+                        <a:defRPr sz="1100" b="0">
                           <a:solidFill>
-                            <a:srgbClr val="1D2735"/>
+                            <a:srgbClr val="1C2634"/>
                           </a:solidFill>
-                          <a:latin typeface="Aptos"/>
+                          <a:latin typeface="Helvetica Neue"/>
                         </a:defRPr>
                       </a:pPr>
                       <a:r>
@@ -5625,25 +5715,25 @@
                       </a:r>
                     </a:p>
                   </a:txBody>
-                  <a:tcPr marL="45720" marR="45720" marT="27432" marB="27432">
+                  <a:tcPr marL="54864" marR="54864" marT="27432" marB="27432">
                     <a:solidFill>
-                      <a:srgbClr val="F6F8FA"/>
+                      <a:srgbClr val="F6F8FB"/>
                     </a:solidFill>
                   </a:tcPr>
                 </a:tc>
               </a:tr>
-              <a:tr h="483330">
+              <a:tr h="446754">
                 <a:tc>
                   <a:txBody>
                     <a:bodyPr/>
                     <a:lstStyle/>
                     <a:p>
                       <a:pPr>
-                        <a:defRPr sz="1200" b="0">
+                        <a:defRPr sz="1100" b="0">
                           <a:solidFill>
-                            <a:srgbClr val="1D2735"/>
+                            <a:srgbClr val="1C2634"/>
                           </a:solidFill>
-                          <a:latin typeface="Aptos"/>
+                          <a:latin typeface="Helvetica Neue"/>
                         </a:defRPr>
                       </a:pPr>
                       <a:r>
@@ -5651,7 +5741,7 @@
                       </a:r>
                     </a:p>
                   </a:txBody>
-                  <a:tcPr marL="45720" marR="45720" marT="27432" marB="27432">
+                  <a:tcPr marL="54864" marR="54864" marT="27432" marB="27432">
                     <a:solidFill>
                       <a:srgbClr val="FFFFFF"/>
                     </a:solidFill>
@@ -5663,11 +5753,11 @@
                     <a:lstStyle/>
                     <a:p>
                       <a:pPr>
-                        <a:defRPr sz="1200" b="0">
+                        <a:defRPr sz="1100" b="0">
                           <a:solidFill>
-                            <a:srgbClr val="1D2735"/>
+                            <a:srgbClr val="1C2634"/>
                           </a:solidFill>
-                          <a:latin typeface="Aptos"/>
+                          <a:latin typeface="Helvetica Neue"/>
                         </a:defRPr>
                       </a:pPr>
                       <a:r>
@@ -5675,7 +5765,7 @@
                       </a:r>
                     </a:p>
                   </a:txBody>
-                  <a:tcPr marL="45720" marR="45720" marT="27432" marB="27432">
+                  <a:tcPr marL="54864" marR="54864" marT="27432" marB="27432">
                     <a:solidFill>
                       <a:srgbClr val="FFFFFF"/>
                     </a:solidFill>
@@ -5688,46 +5778,40 @@
       </p:graphicFrame>
       <p:sp>
         <p:nvSpPr>
-          <p:cNvPr id="6" name="Rounded Rectangle 5"/>
-          <p:cNvSpPr/>
-          <p:nvPr/>
-        </p:nvSpPr>
-        <p:spPr>
-          <a:xfrm>
-            <a:off x="6839712" y="1719072"/>
-            <a:ext cx="4041648" cy="2505456"/>
-          </a:xfrm>
-          <a:prstGeom prst="roundRect">
-            <a:avLst/>
-          </a:prstGeom>
-          <a:solidFill>
-            <a:srgbClr val="FFFFFF"/>
-          </a:solidFill>
-          <a:ln w="9525">
-            <a:solidFill>
-              <a:srgbClr val="D9DEE5"/>
-            </a:solidFill>
-          </a:ln>
-        </p:spPr>
-        <p:style>
-          <a:lnRef idx="1">
-            <a:schemeClr val="accent1"/>
-          </a:lnRef>
-          <a:fillRef idx="3">
-            <a:schemeClr val="accent1"/>
-          </a:fillRef>
-          <a:effectRef idx="2">
-            <a:schemeClr val="accent1"/>
-          </a:effectRef>
-          <a:fontRef idx="minor">
-            <a:schemeClr val="lt1"/>
-          </a:fontRef>
-        </p:style>
-        <p:txBody>
-          <a:bodyPr rtlCol="0" anchor="ctr"/>
-          <a:lstStyle/>
-          <a:p>
-            <a:pPr algn="ctr"/>
+          <p:cNvPr id="6" name="TextBox 5"/>
+          <p:cNvSpPr txBox="1"/>
+          <p:nvPr/>
+        </p:nvSpPr>
+        <p:spPr>
+          <a:xfrm>
+            <a:off x="8247888" y="1572768"/>
+            <a:ext cx="2103120" cy="292608"/>
+          </a:xfrm>
+          <a:prstGeom prst="rect">
+            <a:avLst/>
+          </a:prstGeom>
+          <a:noFill/>
+        </p:spPr>
+        <p:txBody>
+          <a:bodyPr wrap="square" lIns="27432" rIns="27432" tIns="18288" bIns="18288" anchor="t">
+            <a:spAutoFit/>
+          </a:bodyPr>
+          <a:lstStyle/>
+          <a:p>
+            <a:pPr algn="l">
+              <a:spcAft>
+                <a:spcPts val="300"/>
+              </a:spcAft>
+            </a:pPr>
+            <a:r>
+              <a:rPr sz="2000" b="1">
+                <a:solidFill>
+                  <a:srgbClr val="128479"/>
+                </a:solidFill>
+                <a:latin typeface="Helvetica Neue"/>
+              </a:rPr>
+              <a:t>Scoring</a:t>
+            </a:r>
           </a:p>
         </p:txBody>
       </p:sp>
@@ -5739,8 +5823,8 @@
         </p:nvSpPr>
         <p:spPr>
           <a:xfrm>
-            <a:off x="7150608" y="1975104"/>
-            <a:ext cx="3383280" cy="310896"/>
+            <a:off x="8266175" y="2084831"/>
+            <a:ext cx="2971800" cy="1417320"/>
           </a:xfrm>
           <a:prstGeom prst="rect">
             <a:avLst/>
@@ -5748,20 +5832,72 @@
           <a:noFill/>
         </p:spPr>
         <p:txBody>
-          <a:bodyPr wrap="none" lIns="36576" rIns="36576" tIns="18288" bIns="18288" anchor="t">
+          <a:bodyPr wrap="square" lIns="36576" rIns="36576" tIns="18288" bIns="18288">
             <a:spAutoFit/>
           </a:bodyPr>
           <a:lstStyle/>
           <a:p>
-            <a:pPr algn="l"/>
-            <a:r>
-              <a:rPr sz="2200" b="1">
-                <a:solidFill>
-                  <a:srgbClr val="1D2735"/>
-                </a:solidFill>
-                <a:latin typeface="Aptos"/>
-              </a:rPr>
-              <a:t>Scoring</a:t>
+            <a:pPr>
+              <a:spcAft>
+                <a:spcPts val="800"/>
+              </a:spcAft>
+              <a:defRPr sz="1500">
+                <a:solidFill>
+                  <a:srgbClr val="1C2634"/>
+                </a:solidFill>
+                <a:latin typeface="Helvetica Neue"/>
+              </a:defRPr>
+            </a:pPr>
+            <a:r>
+              <a:t>API-name accuracy</a:t>
+            </a:r>
+          </a:p>
+          <a:p>
+            <a:pPr>
+              <a:spcAft>
+                <a:spcPts val="800"/>
+              </a:spcAft>
+              <a:defRPr sz="1500">
+                <a:solidFill>
+                  <a:srgbClr val="1C2634"/>
+                </a:solidFill>
+                <a:latin typeface="Helvetica Neue"/>
+              </a:defRPr>
+            </a:pPr>
+            <a:r>
+              <a:t>Exact full-call accuracy</a:t>
+            </a:r>
+          </a:p>
+          <a:p>
+            <a:pPr>
+              <a:spcAft>
+                <a:spcPts val="800"/>
+              </a:spcAft>
+              <a:defRPr sz="1500">
+                <a:solidFill>
+                  <a:srgbClr val="1C2634"/>
+                </a:solidFill>
+                <a:latin typeface="Helvetica Neue"/>
+              </a:defRPr>
+            </a:pPr>
+            <a:r>
+              <a:t>Name + any parameter</a:t>
+            </a:r>
+          </a:p>
+          <a:p>
+            <a:pPr>
+              <a:spcAft>
+                <a:spcPts val="800"/>
+              </a:spcAft>
+              <a:defRPr sz="1500">
+                <a:solidFill>
+                  <a:srgbClr val="1C2634"/>
+                </a:solidFill>
+                <a:latin typeface="Helvetica Neue"/>
+              </a:defRPr>
+            </a:pPr>
+            <a:r>
+              <a:t>Malformed or no-call rate</a:t>
             </a:r>
           </a:p>
         </p:txBody>
@@ -5774,8 +5910,8 @@
         </p:nvSpPr>
         <p:spPr>
           <a:xfrm>
-            <a:off x="7187184" y="2523744"/>
-            <a:ext cx="3246120" cy="1225296"/>
+            <a:off x="960120" y="5230368"/>
+            <a:ext cx="9784080" cy="292608"/>
           </a:xfrm>
           <a:prstGeom prst="rect">
             <a:avLst/>
@@ -5783,56 +5919,24 @@
           <a:noFill/>
         </p:spPr>
         <p:txBody>
-          <a:bodyPr wrap="none" lIns="73152" rIns="73152" tIns="27432" bIns="27432">
+          <a:bodyPr wrap="square" lIns="27432" rIns="27432" tIns="18288" bIns="18288" anchor="t">
             <a:spAutoFit/>
           </a:bodyPr>
           <a:lstStyle/>
           <a:p>
-            <a:pPr>
-              <a:spcAft>
-                <a:spcPts val="1000"/>
-              </a:spcAft>
-              <a:defRPr sz="1700">
-                <a:solidFill>
-                  <a:srgbClr val="1D2735"/>
-                </a:solidFill>
-                <a:latin typeface="Aptos"/>
-              </a:defRPr>
-            </a:pPr>
-            <a:r>
-              <a:t>API-name accuracy</a:t>
-            </a:r>
-          </a:p>
-          <a:p>
-            <a:pPr>
-              <a:spcAft>
-                <a:spcPts val="1000"/>
-              </a:spcAft>
-              <a:defRPr sz="1700">
-                <a:solidFill>
-                  <a:srgbClr val="1D2735"/>
-                </a:solidFill>
-                <a:latin typeface="Aptos"/>
-              </a:defRPr>
-            </a:pPr>
-            <a:r>
-              <a:t>Exact full-call accuracy</a:t>
-            </a:r>
-          </a:p>
-          <a:p>
-            <a:pPr>
-              <a:spcAft>
-                <a:spcPts val="1000"/>
-              </a:spcAft>
-              <a:defRPr sz="1700">
-                <a:solidFill>
-                  <a:srgbClr val="1D2735"/>
-                </a:solidFill>
-                <a:latin typeface="Aptos"/>
-              </a:defRPr>
-            </a:pPr>
-            <a:r>
-              <a:t>Error buckets for wrong API, wrong args, and malformed outputs</a:t>
+            <a:pPr algn="ctr">
+              <a:spcAft>
+                <a:spcPts val="300"/>
+              </a:spcAft>
+            </a:pPr>
+            <a:r>
+              <a:rPr sz="1900" b="1">
+                <a:solidFill>
+                  <a:srgbClr val="1C2634"/>
+                </a:solidFill>
+                <a:latin typeface="Helvetica Neue"/>
+              </a:rPr>
+              <a:t>Token count is the main fairness caveat.</a:t>
             </a:r>
           </a:p>
         </p:txBody>
@@ -5845,8 +5949,8 @@
         </p:nvSpPr>
         <p:spPr>
           <a:xfrm>
-            <a:off x="603504" y="6437376"/>
-            <a:ext cx="2926080" cy="201168"/>
+            <a:off x="658368" y="6464808"/>
+            <a:ext cx="2743200" cy="164592"/>
           </a:xfrm>
           <a:prstGeom prst="rect">
             <a:avLst/>
@@ -5854,18 +5958,22 @@
           <a:noFill/>
         </p:spPr>
         <p:txBody>
-          <a:bodyPr wrap="none" lIns="36576" rIns="36576" tIns="18288" bIns="18288" anchor="t">
+          <a:bodyPr wrap="square" lIns="27432" rIns="27432" tIns="18288" bIns="18288" anchor="t">
             <a:spAutoFit/>
           </a:bodyPr>
           <a:lstStyle/>
           <a:p>
-            <a:pPr algn="l"/>
-            <a:r>
-              <a:rPr sz="800" b="0">
-                <a:solidFill>
-                  <a:srgbClr val="5E6C84"/>
-                </a:solidFill>
-                <a:latin typeface="Aptos"/>
+            <a:pPr algn="l">
+              <a:spcAft>
+                <a:spcPts val="300"/>
+              </a:spcAft>
+            </a:pPr>
+            <a:r>
+              <a:rPr sz="700" b="0">
+                <a:solidFill>
+                  <a:srgbClr val="596880"/>
+                </a:solidFill>
+                <a:latin typeface="Helvetica Neue"/>
               </a:rPr>
               <a:t>CS 590NN Final Project</a:t>
             </a:r>
@@ -5880,8 +5988,8 @@
         </p:nvSpPr>
         <p:spPr>
           <a:xfrm>
-            <a:off x="11247120" y="6437376"/>
-            <a:ext cx="320040" cy="201168"/>
+            <a:off x="11320272" y="6464808"/>
+            <a:ext cx="228600" cy="164592"/>
           </a:xfrm>
           <a:prstGeom prst="rect">
             <a:avLst/>
@@ -5889,18 +5997,22 @@
           <a:noFill/>
         </p:spPr>
         <p:txBody>
-          <a:bodyPr wrap="none" lIns="36576" rIns="36576" tIns="18288" bIns="18288" anchor="t">
+          <a:bodyPr wrap="square" lIns="27432" rIns="27432" tIns="18288" bIns="18288" anchor="t">
             <a:spAutoFit/>
           </a:bodyPr>
           <a:lstStyle/>
           <a:p>
-            <a:pPr algn="r"/>
-            <a:r>
-              <a:rPr sz="800" b="0">
-                <a:solidFill>
-                  <a:srgbClr val="5E6C84"/>
-                </a:solidFill>
-                <a:latin typeface="Aptos"/>
+            <a:pPr algn="r">
+              <a:spcAft>
+                <a:spcPts val="300"/>
+              </a:spcAft>
+            </a:pPr>
+            <a:r>
+              <a:rPr sz="700" b="0">
+                <a:solidFill>
+                  <a:srgbClr val="596880"/>
+                </a:solidFill>
+                <a:latin typeface="Helvetica Neue"/>
               </a:rPr>
               <a:t>4</a:t>
             </a:r>
@@ -5933,8 +6045,8 @@
         </p:nvSpPr>
         <p:spPr>
           <a:xfrm>
-            <a:off x="594360" y="329184"/>
-            <a:ext cx="9875520" cy="530352"/>
+            <a:off x="658368" y="347472"/>
+            <a:ext cx="10789920" cy="393192"/>
           </a:xfrm>
           <a:prstGeom prst="rect">
             <a:avLst/>
@@ -5942,18 +6054,22 @@
           <a:noFill/>
         </p:spPr>
         <p:txBody>
-          <a:bodyPr wrap="none" lIns="36576" rIns="36576" tIns="18288" bIns="18288" anchor="t">
+          <a:bodyPr wrap="square" lIns="27432" rIns="27432" tIns="18288" bIns="18288" anchor="t">
             <a:spAutoFit/>
           </a:bodyPr>
           <a:lstStyle/>
           <a:p>
-            <a:pPr algn="l"/>
-            <a:r>
-              <a:rPr sz="2900" b="1">
-                <a:solidFill>
-                  <a:srgbClr val="1D2735"/>
-                </a:solidFill>
-                <a:latin typeface="Aptos"/>
+            <a:pPr algn="l">
+              <a:spcAft>
+                <a:spcPts val="300"/>
+              </a:spcAft>
+            </a:pPr>
+            <a:r>
+              <a:rPr sz="2500" b="1">
+                <a:solidFill>
+                  <a:srgbClr val="1C2634"/>
+                </a:solidFill>
+                <a:latin typeface="Helvetica Neue"/>
               </a:rPr>
               <a:t>Main Result</a:t>
             </a:r>
@@ -5968,8 +6084,8 @@
         </p:nvSpPr>
         <p:spPr>
           <a:xfrm>
-            <a:off x="621792" y="850392"/>
-            <a:ext cx="9692640" cy="310896"/>
+            <a:off x="676656" y="786384"/>
+            <a:ext cx="10424160" cy="256032"/>
           </a:xfrm>
           <a:prstGeom prst="rect">
             <a:avLst/>
@@ -5977,20 +6093,24 @@
           <a:noFill/>
         </p:spPr>
         <p:txBody>
-          <a:bodyPr wrap="none" lIns="36576" rIns="36576" tIns="18288" bIns="18288" anchor="t">
+          <a:bodyPr wrap="square" lIns="27432" rIns="27432" tIns="18288" bIns="18288" anchor="t">
             <a:spAutoFit/>
           </a:bodyPr>
           <a:lstStyle/>
           <a:p>
-            <a:pPr algn="l"/>
-            <a:r>
-              <a:rPr sz="1300" b="0">
-                <a:solidFill>
-                  <a:srgbClr val="5E6C84"/>
-                </a:solidFill>
-                <a:latin typeface="Aptos"/>
+            <a:pPr algn="l">
+              <a:spcAft>
+                <a:spcPts val="300"/>
+              </a:spcAft>
+            </a:pPr>
+            <a:r>
+              <a:rPr sz="1100" b="0">
+                <a:solidFill>
+                  <a:srgbClr val="596880"/>
+                </a:solidFill>
+                <a:latin typeface="Helvetica Neue"/>
               </a:rPr>
-              <a:t>Trajectory context improves final exact full-call accuracy on every block.</a:t>
+              <a:t>B has higher final exact full-call accuracy on every held-out block.</a:t>
             </a:r>
           </a:p>
         </p:txBody>
@@ -6003,14 +6123,14 @@
         </p:nvSpPr>
         <p:spPr>
           <a:xfrm>
-            <a:off x="603504" y="1152144"/>
-            <a:ext cx="10972800" cy="18288"/>
+            <a:off x="658368" y="1078992"/>
+            <a:ext cx="10881360" cy="18288"/>
           </a:xfrm>
           <a:prstGeom prst="rect">
             <a:avLst/>
           </a:prstGeom>
           <a:solidFill>
-            <a:srgbClr val="D9DEE5"/>
+            <a:srgbClr val="D7DCE4"/>
           </a:solidFill>
           <a:ln>
             <a:noFill/>
@@ -6046,8 +6166,8 @@
         </p:nvSpPr>
         <p:spPr>
           <a:xfrm>
-            <a:off x="841248" y="1417320"/>
-            <a:ext cx="2148840" cy="658368"/>
+            <a:off x="932688" y="1298448"/>
+            <a:ext cx="1554480" cy="438912"/>
           </a:xfrm>
           <a:prstGeom prst="rect">
             <a:avLst/>
@@ -6055,18 +6175,22 @@
           <a:noFill/>
         </p:spPr>
         <p:txBody>
-          <a:bodyPr wrap="none" lIns="36576" rIns="36576" tIns="18288" bIns="18288" anchor="t">
+          <a:bodyPr wrap="square" lIns="27432" rIns="27432" tIns="18288" bIns="18288" anchor="t">
             <a:spAutoFit/>
           </a:bodyPr>
           <a:lstStyle/>
           <a:p>
-            <a:pPr algn="ctr"/>
-            <a:r>
-              <a:rPr sz="3600" b="1">
-                <a:solidFill>
-                  <a:srgbClr val="B94846"/>
-                </a:solidFill>
-                <a:latin typeface="Aptos"/>
+            <a:pPr algn="ctr">
+              <a:spcAft>
+                <a:spcPts val="300"/>
+              </a:spcAft>
+            </a:pPr>
+            <a:r>
+              <a:rPr sz="2900" b="1">
+                <a:solidFill>
+                  <a:srgbClr val="B54745"/>
+                </a:solidFill>
+                <a:latin typeface="Helvetica Neue"/>
               </a:rPr>
               <a:t>39.2%</a:t>
             </a:r>
@@ -6081,8 +6205,8 @@
         </p:nvSpPr>
         <p:spPr>
           <a:xfrm>
-            <a:off x="841248" y="2084832"/>
-            <a:ext cx="2148840" cy="384048"/>
+            <a:off x="932688" y="1773936"/>
+            <a:ext cx="1554480" cy="219456"/>
           </a:xfrm>
           <a:prstGeom prst="rect">
             <a:avLst/>
@@ -6090,18 +6214,22 @@
           <a:noFill/>
         </p:spPr>
         <p:txBody>
-          <a:bodyPr wrap="none" lIns="36576" rIns="36576" tIns="18288" bIns="18288" anchor="t">
+          <a:bodyPr wrap="square" lIns="27432" rIns="27432" tIns="18288" bIns="18288" anchor="t">
             <a:spAutoFit/>
           </a:bodyPr>
           <a:lstStyle/>
           <a:p>
-            <a:pPr algn="ctr"/>
-            <a:r>
-              <a:rPr sz="1100" b="0">
-                <a:solidFill>
-                  <a:srgbClr val="5E6C84"/>
-                </a:solidFill>
-                <a:latin typeface="Aptos"/>
+            <a:pPr algn="ctr">
+              <a:spcAft>
+                <a:spcPts val="300"/>
+              </a:spcAft>
+            </a:pPr>
+            <a:r>
+              <a:rPr sz="900" b="0">
+                <a:solidFill>
+                  <a:srgbClr val="596880"/>
+                </a:solidFill>
+                <a:latin typeface="Helvetica Neue"/>
               </a:rPr>
               <a:t>A mean exact</a:t>
             </a:r>
@@ -6116,8 +6244,8 @@
         </p:nvSpPr>
         <p:spPr>
           <a:xfrm>
-            <a:off x="2761488" y="1417320"/>
-            <a:ext cx="2148840" cy="658368"/>
+            <a:off x="2743200" y="1298448"/>
+            <a:ext cx="1554480" cy="438912"/>
           </a:xfrm>
           <a:prstGeom prst="rect">
             <a:avLst/>
@@ -6125,18 +6253,22 @@
           <a:noFill/>
         </p:spPr>
         <p:txBody>
-          <a:bodyPr wrap="none" lIns="36576" rIns="36576" tIns="18288" bIns="18288" anchor="t">
+          <a:bodyPr wrap="square" lIns="27432" rIns="27432" tIns="18288" bIns="18288" anchor="t">
             <a:spAutoFit/>
           </a:bodyPr>
           <a:lstStyle/>
           <a:p>
-            <a:pPr algn="ctr"/>
-            <a:r>
-              <a:rPr sz="3600" b="1">
-                <a:solidFill>
-                  <a:srgbClr val="148479"/>
-                </a:solidFill>
-                <a:latin typeface="Aptos"/>
+            <a:pPr algn="ctr">
+              <a:spcAft>
+                <a:spcPts val="300"/>
+              </a:spcAft>
+            </a:pPr>
+            <a:r>
+              <a:rPr sz="2900" b="1">
+                <a:solidFill>
+                  <a:srgbClr val="128479"/>
+                </a:solidFill>
+                <a:latin typeface="Helvetica Neue"/>
               </a:rPr>
               <a:t>56.9%</a:t>
             </a:r>
@@ -6151,8 +6283,8 @@
         </p:nvSpPr>
         <p:spPr>
           <a:xfrm>
-            <a:off x="2761488" y="2084832"/>
-            <a:ext cx="2148840" cy="384048"/>
+            <a:off x="2743200" y="1773936"/>
+            <a:ext cx="1554480" cy="219456"/>
           </a:xfrm>
           <a:prstGeom prst="rect">
             <a:avLst/>
@@ -6160,18 +6292,22 @@
           <a:noFill/>
         </p:spPr>
         <p:txBody>
-          <a:bodyPr wrap="none" lIns="36576" rIns="36576" tIns="18288" bIns="18288" anchor="t">
+          <a:bodyPr wrap="square" lIns="27432" rIns="27432" tIns="18288" bIns="18288" anchor="t">
             <a:spAutoFit/>
           </a:bodyPr>
           <a:lstStyle/>
           <a:p>
-            <a:pPr algn="ctr"/>
-            <a:r>
-              <a:rPr sz="1100" b="0">
-                <a:solidFill>
-                  <a:srgbClr val="5E6C84"/>
-                </a:solidFill>
-                <a:latin typeface="Aptos"/>
+            <a:pPr algn="ctr">
+              <a:spcAft>
+                <a:spcPts val="300"/>
+              </a:spcAft>
+            </a:pPr>
+            <a:r>
+              <a:rPr sz="900" b="0">
+                <a:solidFill>
+                  <a:srgbClr val="596880"/>
+                </a:solidFill>
+                <a:latin typeface="Helvetica Neue"/>
               </a:rPr>
               <a:t>B mean exact</a:t>
             </a:r>
@@ -6186,8 +6322,8 @@
         </p:nvSpPr>
         <p:spPr>
           <a:xfrm>
-            <a:off x="4681728" y="1417320"/>
-            <a:ext cx="2148840" cy="658368"/>
+            <a:off x="4553712" y="1298448"/>
+            <a:ext cx="1554480" cy="438912"/>
           </a:xfrm>
           <a:prstGeom prst="rect">
             <a:avLst/>
@@ -6195,18 +6331,22 @@
           <a:noFill/>
         </p:spPr>
         <p:txBody>
-          <a:bodyPr wrap="none" lIns="36576" rIns="36576" tIns="18288" bIns="18288" anchor="t">
+          <a:bodyPr wrap="square" lIns="27432" rIns="27432" tIns="18288" bIns="18288" anchor="t">
             <a:spAutoFit/>
           </a:bodyPr>
           <a:lstStyle/>
           <a:p>
-            <a:pPr algn="ctr"/>
-            <a:r>
-              <a:rPr sz="3600" b="1">
-                <a:solidFill>
-                  <a:srgbClr val="B78021"/>
-                </a:solidFill>
-                <a:latin typeface="Aptos"/>
+            <a:pPr algn="ctr">
+              <a:spcAft>
+                <a:spcPts val="300"/>
+              </a:spcAft>
+            </a:pPr>
+            <a:r>
+              <a:rPr sz="2900" b="1">
+                <a:solidFill>
+                  <a:srgbClr val="AE7A25"/>
+                </a:solidFill>
+                <a:latin typeface="Helvetica Neue"/>
               </a:rPr>
               <a:t>+17.7</a:t>
             </a:r>
@@ -6221,8 +6361,8 @@
         </p:nvSpPr>
         <p:spPr>
           <a:xfrm>
-            <a:off x="4681728" y="2084832"/>
-            <a:ext cx="2148840" cy="384048"/>
+            <a:off x="4553712" y="1773936"/>
+            <a:ext cx="1554480" cy="219456"/>
           </a:xfrm>
           <a:prstGeom prst="rect">
             <a:avLst/>
@@ -6230,18 +6370,22 @@
           <a:noFill/>
         </p:spPr>
         <p:txBody>
-          <a:bodyPr wrap="none" lIns="36576" rIns="36576" tIns="18288" bIns="18288" anchor="t">
+          <a:bodyPr wrap="square" lIns="27432" rIns="27432" tIns="18288" bIns="18288" anchor="t">
             <a:spAutoFit/>
           </a:bodyPr>
           <a:lstStyle/>
           <a:p>
-            <a:pPr algn="ctr"/>
-            <a:r>
-              <a:rPr sz="1100" b="0">
-                <a:solidFill>
-                  <a:srgbClr val="5E6C84"/>
-                </a:solidFill>
-                <a:latin typeface="Aptos"/>
+            <a:pPr algn="ctr">
+              <a:spcAft>
+                <a:spcPts val="300"/>
+              </a:spcAft>
+            </a:pPr>
+            <a:r>
+              <a:rPr sz="900" b="0">
+                <a:solidFill>
+                  <a:srgbClr val="596880"/>
+                </a:solidFill>
+                <a:latin typeface="Helvetica Neue"/>
               </a:rPr>
               <a:t>point gap</a:t>
             </a:r>
@@ -6257,8 +6401,8 @@
           <p:nvPr/>
         </p:nvGraphicFramePr>
         <p:xfrm>
-          <a:off x="914400" y="2779776"/>
-          <a:ext cx="6400800" cy="2788920"/>
+          <a:off x="914400" y="2304288"/>
+          <a:ext cx="9966960" cy="3246120"/>
         </p:xfrm>
         <a:graphic>
           <a:graphicData uri="http://schemas.openxmlformats.org/drawingml/2006/chart">
@@ -6268,46 +6412,40 @@
       </p:graphicFrame>
       <p:sp>
         <p:nvSpPr>
-          <p:cNvPr id="12" name="Rounded Rectangle 11"/>
-          <p:cNvSpPr/>
-          <p:nvPr/>
-        </p:nvSpPr>
-        <p:spPr>
-          <a:xfrm>
-            <a:off x="7863840" y="2834640"/>
-            <a:ext cx="3200400" cy="2331720"/>
-          </a:xfrm>
-          <a:prstGeom prst="roundRect">
-            <a:avLst/>
-          </a:prstGeom>
-          <a:solidFill>
-            <a:srgbClr val="FFFFFF"/>
-          </a:solidFill>
-          <a:ln w="9525">
-            <a:solidFill>
-              <a:srgbClr val="D9DEE5"/>
-            </a:solidFill>
-          </a:ln>
-        </p:spPr>
-        <p:style>
-          <a:lnRef idx="1">
-            <a:schemeClr val="accent1"/>
-          </a:lnRef>
-          <a:fillRef idx="3">
-            <a:schemeClr val="accent1"/>
-          </a:fillRef>
-          <a:effectRef idx="2">
-            <a:schemeClr val="accent1"/>
-          </a:effectRef>
-          <a:fontRef idx="minor">
-            <a:schemeClr val="lt1"/>
-          </a:fontRef>
-        </p:style>
-        <p:txBody>
-          <a:bodyPr rtlCol="0" anchor="ctr"/>
-          <a:lstStyle/>
-          <a:p>
-            <a:pPr algn="ctr"/>
+          <p:cNvPr id="12" name="TextBox 11"/>
+          <p:cNvSpPr txBox="1"/>
+          <p:nvPr/>
+        </p:nvSpPr>
+        <p:spPr>
+          <a:xfrm>
+            <a:off x="7059168" y="1444752"/>
+            <a:ext cx="3931920" cy="256032"/>
+          </a:xfrm>
+          <a:prstGeom prst="rect">
+            <a:avLst/>
+          </a:prstGeom>
+          <a:noFill/>
+        </p:spPr>
+        <p:txBody>
+          <a:bodyPr wrap="square" lIns="27432" rIns="27432" tIns="18288" bIns="18288" anchor="t">
+            <a:spAutoFit/>
+          </a:bodyPr>
+          <a:lstStyle/>
+          <a:p>
+            <a:pPr algn="r">
+              <a:spcAft>
+                <a:spcPts val="300"/>
+              </a:spcAft>
+            </a:pPr>
+            <a:r>
+              <a:rPr sz="1500" b="0">
+                <a:solidFill>
+                  <a:srgbClr val="596880"/>
+                </a:solidFill>
+                <a:latin typeface="Helvetica Neue"/>
+              </a:rPr>
+              <a:t>Still not causal: B also trains on more tokens.</a:t>
+            </a:r>
           </a:p>
         </p:txBody>
       </p:sp>
@@ -6319,8 +6457,8 @@
         </p:nvSpPr>
         <p:spPr>
           <a:xfrm>
-            <a:off x="8156448" y="3090672"/>
-            <a:ext cx="2606040" cy="292608"/>
+            <a:off x="658368" y="6464808"/>
+            <a:ext cx="2743200" cy="164592"/>
           </a:xfrm>
           <a:prstGeom prst="rect">
             <a:avLst/>
@@ -6328,20 +6466,24 @@
           <a:noFill/>
         </p:spPr>
         <p:txBody>
-          <a:bodyPr wrap="none" lIns="36576" rIns="36576" tIns="18288" bIns="18288" anchor="t">
+          <a:bodyPr wrap="square" lIns="27432" rIns="27432" tIns="18288" bIns="18288" anchor="t">
             <a:spAutoFit/>
           </a:bodyPr>
           <a:lstStyle/>
           <a:p>
-            <a:pPr algn="l"/>
-            <a:r>
-              <a:rPr sz="2000" b="1">
-                <a:solidFill>
-                  <a:srgbClr val="1D2735"/>
-                </a:solidFill>
-                <a:latin typeface="Aptos"/>
+            <a:pPr algn="l">
+              <a:spcAft>
+                <a:spcPts val="300"/>
+              </a:spcAft>
+            </a:pPr>
+            <a:r>
+              <a:rPr sz="700" b="0">
+                <a:solidFill>
+                  <a:srgbClr val="596880"/>
+                </a:solidFill>
+                <a:latin typeface="Helvetica Neue"/>
               </a:rPr>
-              <a:t>Interpretation</a:t>
+              <a:t>CS 590NN Final Project</a:t>
             </a:r>
           </a:p>
         </p:txBody>
@@ -6354,8 +6496,8 @@
         </p:nvSpPr>
         <p:spPr>
           <a:xfrm>
-            <a:off x="8174736" y="3566160"/>
-            <a:ext cx="2578608" cy="969264"/>
+            <a:off x="11320272" y="6464808"/>
+            <a:ext cx="228600" cy="164592"/>
           </a:xfrm>
           <a:prstGeom prst="rect">
             <a:avLst/>
@@ -6363,88 +6505,22 @@
           <a:noFill/>
         </p:spPr>
         <p:txBody>
-          <a:bodyPr wrap="none" lIns="36576" rIns="36576" tIns="18288" bIns="18288" anchor="t">
+          <a:bodyPr wrap="square" lIns="27432" rIns="27432" tIns="18288" bIns="18288" anchor="t">
             <a:spAutoFit/>
           </a:bodyPr>
           <a:lstStyle/>
           <a:p>
-            <a:pPr algn="l"/>
-            <a:r>
-              <a:rPr sz="1600" b="0">
-                <a:solidFill>
-                  <a:srgbClr val="1D2735"/>
-                </a:solidFill>
-                <a:latin typeface="Aptos"/>
-              </a:rPr>
-              <a:t>B keeps more context, but token budget is not controlled.</a:t>
-            </a:r>
-          </a:p>
-        </p:txBody>
-      </p:sp>
-      <p:sp>
-        <p:nvSpPr>
-          <p:cNvPr id="15" name="TextBox 14"/>
-          <p:cNvSpPr txBox="1"/>
-          <p:nvPr/>
-        </p:nvSpPr>
-        <p:spPr>
-          <a:xfrm>
-            <a:off x="603504" y="6437376"/>
-            <a:ext cx="2926080" cy="201168"/>
-          </a:xfrm>
-          <a:prstGeom prst="rect">
-            <a:avLst/>
-          </a:prstGeom>
-          <a:noFill/>
-        </p:spPr>
-        <p:txBody>
-          <a:bodyPr wrap="none" lIns="36576" rIns="36576" tIns="18288" bIns="18288" anchor="t">
-            <a:spAutoFit/>
-          </a:bodyPr>
-          <a:lstStyle/>
-          <a:p>
-            <a:pPr algn="l"/>
-            <a:r>
-              <a:rPr sz="800" b="0">
-                <a:solidFill>
-                  <a:srgbClr val="5E6C84"/>
-                </a:solidFill>
-                <a:latin typeface="Aptos"/>
-              </a:rPr>
-              <a:t>CS 590NN Final Project</a:t>
-            </a:r>
-          </a:p>
-        </p:txBody>
-      </p:sp>
-      <p:sp>
-        <p:nvSpPr>
-          <p:cNvPr id="16" name="TextBox 15"/>
-          <p:cNvSpPr txBox="1"/>
-          <p:nvPr/>
-        </p:nvSpPr>
-        <p:spPr>
-          <a:xfrm>
-            <a:off x="11247120" y="6437376"/>
-            <a:ext cx="320040" cy="201168"/>
-          </a:xfrm>
-          <a:prstGeom prst="rect">
-            <a:avLst/>
-          </a:prstGeom>
-          <a:noFill/>
-        </p:spPr>
-        <p:txBody>
-          <a:bodyPr wrap="none" lIns="36576" rIns="36576" tIns="18288" bIns="18288" anchor="t">
-            <a:spAutoFit/>
-          </a:bodyPr>
-          <a:lstStyle/>
-          <a:p>
-            <a:pPr algn="r"/>
-            <a:r>
-              <a:rPr sz="800" b="0">
-                <a:solidFill>
-                  <a:srgbClr val="5E6C84"/>
-                </a:solidFill>
-                <a:latin typeface="Aptos"/>
+            <a:pPr algn="r">
+              <a:spcAft>
+                <a:spcPts val="300"/>
+              </a:spcAft>
+            </a:pPr>
+            <a:r>
+              <a:rPr sz="700" b="0">
+                <a:solidFill>
+                  <a:srgbClr val="596880"/>
+                </a:solidFill>
+                <a:latin typeface="Helvetica Neue"/>
               </a:rPr>
               <a:t>5</a:t>
             </a:r>
@@ -6477,8 +6553,8 @@
         </p:nvSpPr>
         <p:spPr>
           <a:xfrm>
-            <a:off x="594360" y="329184"/>
-            <a:ext cx="9875520" cy="530352"/>
+            <a:off x="658368" y="347472"/>
+            <a:ext cx="10789920" cy="393192"/>
           </a:xfrm>
           <a:prstGeom prst="rect">
             <a:avLst/>
@@ -6486,18 +6562,22 @@
           <a:noFill/>
         </p:spPr>
         <p:txBody>
-          <a:bodyPr wrap="none" lIns="36576" rIns="36576" tIns="18288" bIns="18288" anchor="t">
+          <a:bodyPr wrap="square" lIns="27432" rIns="27432" tIns="18288" bIns="18288" anchor="t">
             <a:spAutoFit/>
           </a:bodyPr>
           <a:lstStyle/>
           <a:p>
-            <a:pPr algn="l"/>
-            <a:r>
-              <a:rPr sz="2900" b="1">
-                <a:solidFill>
-                  <a:srgbClr val="1D2735"/>
-                </a:solidFill>
-                <a:latin typeface="Aptos"/>
+            <a:pPr algn="l">
+              <a:spcAft>
+                <a:spcPts val="300"/>
+              </a:spcAft>
+            </a:pPr>
+            <a:r>
+              <a:rPr sz="2500" b="1">
+                <a:solidFill>
+                  <a:srgbClr val="1C2634"/>
+                </a:solidFill>
+                <a:latin typeface="Helvetica Neue"/>
               </a:rPr>
               <a:t>Continual Evaluation</a:t>
             </a:r>
@@ -6512,8 +6592,8 @@
         </p:nvSpPr>
         <p:spPr>
           <a:xfrm>
-            <a:off x="621792" y="850392"/>
-            <a:ext cx="9692640" cy="310896"/>
+            <a:off x="676656" y="786384"/>
+            <a:ext cx="10424160" cy="256032"/>
           </a:xfrm>
           <a:prstGeom prst="rect">
             <a:avLst/>
@@ -6521,20 +6601,24 @@
           <a:noFill/>
         </p:spPr>
         <p:txBody>
-          <a:bodyPr wrap="none" lIns="36576" rIns="36576" tIns="18288" bIns="18288" anchor="t">
+          <a:bodyPr wrap="square" lIns="27432" rIns="27432" tIns="18288" bIns="18288" anchor="t">
             <a:spAutoFit/>
           </a:bodyPr>
           <a:lstStyle/>
           <a:p>
-            <a:pPr algn="l"/>
-            <a:r>
-              <a:rPr sz="1300" b="0">
-                <a:solidFill>
-                  <a:srgbClr val="5E6C84"/>
-                </a:solidFill>
-                <a:latin typeface="Aptos"/>
+            <a:pPr algn="l">
+              <a:spcAft>
+                <a:spcPts val="300"/>
+              </a:spcAft>
+            </a:pPr>
+            <a:r>
+              <a:rPr sz="1100" b="0">
+                <a:solidFill>
+                  <a:srgbClr val="596880"/>
+                </a:solidFill>
+                <a:latin typeface="Helvetica Neue"/>
               </a:rPr>
-              <a:t>Accuracy is measured after each training block, not only at the end.</a:t>
+              <a:t>We score all blocks after each training stage.</a:t>
             </a:r>
           </a:p>
         </p:txBody>
@@ -6547,14 +6631,14 @@
         </p:nvSpPr>
         <p:spPr>
           <a:xfrm>
-            <a:off x="603504" y="1152144"/>
-            <a:ext cx="10972800" cy="18288"/>
+            <a:off x="658368" y="1078992"/>
+            <a:ext cx="10881360" cy="18288"/>
           </a:xfrm>
           <a:prstGeom prst="rect">
             <a:avLst/>
           </a:prstGeom>
           <a:solidFill>
-            <a:srgbClr val="D9DEE5"/>
+            <a:srgbClr val="D7DCE4"/>
           </a:solidFill>
           <a:ln>
             <a:noFill/>
@@ -6598,8 +6682,8 @@
         </p:blipFill>
         <p:spPr>
           <a:xfrm>
-            <a:off x="658368" y="1770803"/>
-            <a:ext cx="7178040" cy="3727874"/>
+            <a:off x="1623118" y="1417320"/>
+            <a:ext cx="8275204" cy="4297680"/>
           </a:xfrm>
           <a:prstGeom prst="rect">
             <a:avLst/>
@@ -6608,46 +6692,40 @@
       </p:pic>
       <p:sp>
         <p:nvSpPr>
-          <p:cNvPr id="6" name="Rounded Rectangle 5"/>
-          <p:cNvSpPr/>
-          <p:nvPr/>
-        </p:nvSpPr>
-        <p:spPr>
-          <a:xfrm>
-            <a:off x="8156448" y="1572768"/>
-            <a:ext cx="3127248" cy="3621024"/>
-          </a:xfrm>
-          <a:prstGeom prst="roundRect">
-            <a:avLst/>
-          </a:prstGeom>
-          <a:solidFill>
-            <a:srgbClr val="FFFFFF"/>
-          </a:solidFill>
-          <a:ln w="9525">
-            <a:solidFill>
-              <a:srgbClr val="D9DEE5"/>
-            </a:solidFill>
-          </a:ln>
-        </p:spPr>
-        <p:style>
-          <a:lnRef idx="1">
-            <a:schemeClr val="accent1"/>
-          </a:lnRef>
-          <a:fillRef idx="3">
-            <a:schemeClr val="accent1"/>
-          </a:fillRef>
-          <a:effectRef idx="2">
-            <a:schemeClr val="accent1"/>
-          </a:effectRef>
-          <a:fontRef idx="minor">
-            <a:schemeClr val="lt1"/>
-          </a:fontRef>
-        </p:style>
-        <p:txBody>
-          <a:bodyPr rtlCol="0" anchor="ctr"/>
-          <a:lstStyle/>
-          <a:p>
-            <a:pPr algn="ctr"/>
+          <p:cNvPr id="6" name="TextBox 5"/>
+          <p:cNvSpPr txBox="1"/>
+          <p:nvPr/>
+        </p:nvSpPr>
+        <p:spPr>
+          <a:xfrm>
+            <a:off x="1097280" y="5742432"/>
+            <a:ext cx="9509760" cy="274320"/>
+          </a:xfrm>
+          <a:prstGeom prst="rect">
+            <a:avLst/>
+          </a:prstGeom>
+          <a:noFill/>
+        </p:spPr>
+        <p:txBody>
+          <a:bodyPr wrap="square" lIns="27432" rIns="27432" tIns="18288" bIns="18288" anchor="t">
+            <a:spAutoFit/>
+          </a:bodyPr>
+          <a:lstStyle/>
+          <a:p>
+            <a:pPr algn="ctr">
+              <a:spcAft>
+                <a:spcPts val="300"/>
+              </a:spcAft>
+            </a:pPr>
+            <a:r>
+              <a:rPr sz="1800" b="1">
+                <a:solidFill>
+                  <a:srgbClr val="1C2634"/>
+                </a:solidFill>
+                <a:latin typeface="Helvetica Neue"/>
+              </a:rPr>
+              <a:t>B is higher on every final-stage block and most earlier train/eval pairs.</a:t>
+            </a:r>
           </a:p>
         </p:txBody>
       </p:sp>
@@ -6659,8 +6737,8 @@
         </p:nvSpPr>
         <p:spPr>
           <a:xfrm>
-            <a:off x="8449056" y="1865376"/>
-            <a:ext cx="2560320" cy="301752"/>
+            <a:off x="658368" y="6464808"/>
+            <a:ext cx="2743200" cy="164592"/>
           </a:xfrm>
           <a:prstGeom prst="rect">
             <a:avLst/>
@@ -6668,20 +6746,24 @@
           <a:noFill/>
         </p:spPr>
         <p:txBody>
-          <a:bodyPr wrap="none" lIns="36576" rIns="36576" tIns="18288" bIns="18288" anchor="t">
+          <a:bodyPr wrap="square" lIns="27432" rIns="27432" tIns="18288" bIns="18288" anchor="t">
             <a:spAutoFit/>
           </a:bodyPr>
           <a:lstStyle/>
           <a:p>
-            <a:pPr algn="l"/>
-            <a:r>
-              <a:rPr sz="2000" b="1">
-                <a:solidFill>
-                  <a:srgbClr val="1D2735"/>
-                </a:solidFill>
-                <a:latin typeface="Aptos"/>
+            <a:pPr algn="l">
+              <a:spcAft>
+                <a:spcPts val="300"/>
+              </a:spcAft>
+            </a:pPr>
+            <a:r>
+              <a:rPr sz="700" b="0">
+                <a:solidFill>
+                  <a:srgbClr val="596880"/>
+                </a:solidFill>
+                <a:latin typeface="Helvetica Neue"/>
               </a:rPr>
-              <a:t>What to notice</a:t>
+              <a:t>CS 590NN Final Project</a:t>
             </a:r>
           </a:p>
         </p:txBody>
@@ -6694,8 +6776,8 @@
         </p:nvSpPr>
         <p:spPr>
           <a:xfrm>
-            <a:off x="8430768" y="2432304"/>
-            <a:ext cx="2487168" cy="1572768"/>
+            <a:off x="11320272" y="6464808"/>
+            <a:ext cx="228600" cy="164592"/>
           </a:xfrm>
           <a:prstGeom prst="rect">
             <a:avLst/>
@@ -6703,124 +6785,22 @@
           <a:noFill/>
         </p:spPr>
         <p:txBody>
-          <a:bodyPr wrap="none" lIns="73152" rIns="73152" tIns="27432" bIns="27432">
+          <a:bodyPr wrap="square" lIns="27432" rIns="27432" tIns="18288" bIns="18288" anchor="t">
             <a:spAutoFit/>
           </a:bodyPr>
           <a:lstStyle/>
           <a:p>
-            <a:pPr>
-              <a:spcAft>
-                <a:spcPts val="1000"/>
-              </a:spcAft>
-              <a:defRPr sz="1600">
-                <a:solidFill>
-                  <a:srgbClr val="1D2735"/>
-                </a:solidFill>
-                <a:latin typeface="Aptos"/>
-              </a:defRPr>
-            </a:pPr>
-            <a:r>
-              <a:t>The comparison uses a full held-out evaluation at each stage.</a:t>
-            </a:r>
-          </a:p>
-          <a:p>
-            <a:pPr>
-              <a:spcAft>
-                <a:spcPts val="1000"/>
-              </a:spcAft>
-              <a:defRPr sz="1600">
-                <a:solidFill>
-                  <a:srgbClr val="1D2735"/>
-                </a:solidFill>
-                <a:latin typeface="Aptos"/>
-              </a:defRPr>
-            </a:pPr>
-            <a:r>
-              <a:t>B's advantage is visible across multiple trained/evaluated block pairs.</a:t>
-            </a:r>
-          </a:p>
-          <a:p>
-            <a:pPr>
-              <a:spcAft>
-                <a:spcPts val="1000"/>
-              </a:spcAft>
-              <a:defRPr sz="1600">
-                <a:solidFill>
-                  <a:srgbClr val="1D2735"/>
-                </a:solidFill>
-                <a:latin typeface="Aptos"/>
-              </a:defRPr>
-            </a:pPr>
-            <a:r>
-              <a:t>One seed, so treat as preliminary.</a:t>
-            </a:r>
-          </a:p>
-        </p:txBody>
-      </p:sp>
-      <p:sp>
-        <p:nvSpPr>
-          <p:cNvPr id="9" name="TextBox 8"/>
-          <p:cNvSpPr txBox="1"/>
-          <p:nvPr/>
-        </p:nvSpPr>
-        <p:spPr>
-          <a:xfrm>
-            <a:off x="603504" y="6437376"/>
-            <a:ext cx="2926080" cy="201168"/>
-          </a:xfrm>
-          <a:prstGeom prst="rect">
-            <a:avLst/>
-          </a:prstGeom>
-          <a:noFill/>
-        </p:spPr>
-        <p:txBody>
-          <a:bodyPr wrap="none" lIns="36576" rIns="36576" tIns="18288" bIns="18288" anchor="t">
-            <a:spAutoFit/>
-          </a:bodyPr>
-          <a:lstStyle/>
-          <a:p>
-            <a:pPr algn="l"/>
-            <a:r>
-              <a:rPr sz="800" b="0">
-                <a:solidFill>
-                  <a:srgbClr val="5E6C84"/>
-                </a:solidFill>
-                <a:latin typeface="Aptos"/>
-              </a:rPr>
-              <a:t>CS 590NN Final Project</a:t>
-            </a:r>
-          </a:p>
-        </p:txBody>
-      </p:sp>
-      <p:sp>
-        <p:nvSpPr>
-          <p:cNvPr id="10" name="TextBox 9"/>
-          <p:cNvSpPr txBox="1"/>
-          <p:nvPr/>
-        </p:nvSpPr>
-        <p:spPr>
-          <a:xfrm>
-            <a:off x="11247120" y="6437376"/>
-            <a:ext cx="320040" cy="201168"/>
-          </a:xfrm>
-          <a:prstGeom prst="rect">
-            <a:avLst/>
-          </a:prstGeom>
-          <a:noFill/>
-        </p:spPr>
-        <p:txBody>
-          <a:bodyPr wrap="none" lIns="36576" rIns="36576" tIns="18288" bIns="18288" anchor="t">
-            <a:spAutoFit/>
-          </a:bodyPr>
-          <a:lstStyle/>
-          <a:p>
-            <a:pPr algn="r"/>
-            <a:r>
-              <a:rPr sz="800" b="0">
-                <a:solidFill>
-                  <a:srgbClr val="5E6C84"/>
-                </a:solidFill>
-                <a:latin typeface="Aptos"/>
+            <a:pPr algn="r">
+              <a:spcAft>
+                <a:spcPts val="300"/>
+              </a:spcAft>
+            </a:pPr>
+            <a:r>
+              <a:rPr sz="700" b="0">
+                <a:solidFill>
+                  <a:srgbClr val="596880"/>
+                </a:solidFill>
+                <a:latin typeface="Helvetica Neue"/>
               </a:rPr>
               <a:t>6</a:t>
             </a:r>
@@ -6853,8 +6833,8 @@
         </p:nvSpPr>
         <p:spPr>
           <a:xfrm>
-            <a:off x="594360" y="329184"/>
-            <a:ext cx="9875520" cy="530352"/>
+            <a:off x="658368" y="347472"/>
+            <a:ext cx="10789920" cy="393192"/>
           </a:xfrm>
           <a:prstGeom prst="rect">
             <a:avLst/>
@@ -6862,18 +6842,22 @@
           <a:noFill/>
         </p:spPr>
         <p:txBody>
-          <a:bodyPr wrap="none" lIns="36576" rIns="36576" tIns="18288" bIns="18288" anchor="t">
+          <a:bodyPr wrap="square" lIns="27432" rIns="27432" tIns="18288" bIns="18288" anchor="t">
             <a:spAutoFit/>
           </a:bodyPr>
           <a:lstStyle/>
           <a:p>
-            <a:pPr algn="l"/>
-            <a:r>
-              <a:rPr sz="2900" b="1">
-                <a:solidFill>
-                  <a:srgbClr val="1D2735"/>
-                </a:solidFill>
-                <a:latin typeface="Aptos"/>
+            <a:pPr algn="l">
+              <a:spcAft>
+                <a:spcPts val="300"/>
+              </a:spcAft>
+            </a:pPr>
+            <a:r>
+              <a:rPr sz="2500" b="1">
+                <a:solidFill>
+                  <a:srgbClr val="1C2634"/>
+                </a:solidFill>
+                <a:latin typeface="Helvetica Neue"/>
               </a:rPr>
               <a:t>Failure Analysis</a:t>
             </a:r>
@@ -6888,8 +6872,8 @@
         </p:nvSpPr>
         <p:spPr>
           <a:xfrm>
-            <a:off x="621792" y="850392"/>
-            <a:ext cx="9692640" cy="310896"/>
+            <a:off x="676656" y="786384"/>
+            <a:ext cx="10424160" cy="256032"/>
           </a:xfrm>
           <a:prstGeom prst="rect">
             <a:avLst/>
@@ -6897,20 +6881,24 @@
           <a:noFill/>
         </p:spPr>
         <p:txBody>
-          <a:bodyPr wrap="none" lIns="36576" rIns="36576" tIns="18288" bIns="18288" anchor="t">
+          <a:bodyPr wrap="square" lIns="27432" rIns="27432" tIns="18288" bIns="18288" anchor="t">
             <a:spAutoFit/>
           </a:bodyPr>
           <a:lstStyle/>
           <a:p>
-            <a:pPr algn="l"/>
-            <a:r>
-              <a:rPr sz="1300" b="0">
-                <a:solidFill>
-                  <a:srgbClr val="5E6C84"/>
-                </a:solidFill>
-                <a:latin typeface="Aptos"/>
+            <a:pPr algn="l">
+              <a:spcAft>
+                <a:spcPts val="300"/>
+              </a:spcAft>
+            </a:pPr>
+            <a:r>
+              <a:rPr sz="1100" b="0">
+                <a:solidFill>
+                  <a:srgbClr val="596880"/>
+                </a:solidFill>
+                <a:latin typeface="Helvetica Neue"/>
               </a:rPr>
-              <a:t>Trajectory context changes the error mix.</a:t>
+              <a:t>Trajectory context improves API choice but increases parse failures.</a:t>
             </a:r>
           </a:p>
         </p:txBody>
@@ -6923,14 +6911,14 @@
         </p:nvSpPr>
         <p:spPr>
           <a:xfrm>
-            <a:off x="603504" y="1152144"/>
-            <a:ext cx="10972800" cy="18288"/>
+            <a:off x="658368" y="1078992"/>
+            <a:ext cx="10881360" cy="18288"/>
           </a:xfrm>
           <a:prstGeom prst="rect">
             <a:avLst/>
           </a:prstGeom>
           <a:solidFill>
-            <a:srgbClr val="D9DEE5"/>
+            <a:srgbClr val="D7DCE4"/>
           </a:solidFill>
           <a:ln>
             <a:noFill/>
@@ -6967,8 +6955,8 @@
           <p:nvPr/>
         </p:nvGraphicFramePr>
         <p:xfrm>
-          <a:off x="804672" y="1481328"/>
-          <a:ext cx="6080760" cy="2852928"/>
+          <a:off x="822960" y="1444752"/>
+          <a:ext cx="10378440" cy="2468880"/>
         </p:xfrm>
         <a:graphic>
           <a:graphicData uri="http://schemas.openxmlformats.org/drawingml/2006/table">
@@ -6977,12 +6965,12 @@
                 <a:tableStyleId>{5C22544A-7EE6-4342-B048-85BDC9FD1C3A}</a:tableStyleId>
               </a:tblPr>
               <a:tblGrid>
-                <a:gridCol w="2468880"/>
-                <a:gridCol w="914400"/>
-                <a:gridCol w="914400"/>
-                <a:gridCol w="1783080"/>
+                <a:gridCol w="3657600"/>
+                <a:gridCol w="1005840"/>
+                <a:gridCol w="1005840"/>
+                <a:gridCol w="4709160"/>
               </a:tblGrid>
-              <a:tr h="570585">
+              <a:tr h="493776">
                 <a:tc>
                   <a:txBody>
                     <a:bodyPr/>
@@ -6993,17 +6981,17 @@
                           <a:solidFill>
                             <a:srgbClr val="FFFFFF"/>
                           </a:solidFill>
-                          <a:latin typeface="Aptos"/>
+                          <a:latin typeface="Helvetica Neue"/>
                         </a:defRPr>
                       </a:pPr>
                       <a:r>
-                        <a:t>Metric</a:t>
+                        <a:t>Category</a:t>
                       </a:r>
                     </a:p>
                   </a:txBody>
-                  <a:tcPr marL="45720" marR="45720" marT="27432" marB="27432">
+                  <a:tcPr marL="54864" marR="54864" marT="27432" marB="27432">
                     <a:solidFill>
-                      <a:srgbClr val="1D2735"/>
+                      <a:srgbClr val="1C2634"/>
                     </a:solidFill>
                   </a:tcPr>
                 </a:tc>
@@ -7017,7 +7005,7 @@
                           <a:solidFill>
                             <a:srgbClr val="FFFFFF"/>
                           </a:solidFill>
-                          <a:latin typeface="Aptos"/>
+                          <a:latin typeface="Helvetica Neue"/>
                         </a:defRPr>
                       </a:pPr>
                       <a:r>
@@ -7025,9 +7013,9 @@
                       </a:r>
                     </a:p>
                   </a:txBody>
-                  <a:tcPr marL="45720" marR="45720" marT="27432" marB="27432">
+                  <a:tcPr marL="54864" marR="54864" marT="27432" marB="27432">
                     <a:solidFill>
-                      <a:srgbClr val="1D2735"/>
+                      <a:srgbClr val="1C2634"/>
                     </a:solidFill>
                   </a:tcPr>
                 </a:tc>
@@ -7041,7 +7029,7 @@
                           <a:solidFill>
                             <a:srgbClr val="FFFFFF"/>
                           </a:solidFill>
-                          <a:latin typeface="Aptos"/>
+                          <a:latin typeface="Helvetica Neue"/>
                         </a:defRPr>
                       </a:pPr>
                       <a:r>
@@ -7049,9 +7037,9 @@
                       </a:r>
                     </a:p>
                   </a:txBody>
-                  <a:tcPr marL="45720" marR="45720" marT="27432" marB="27432">
+                  <a:tcPr marL="54864" marR="54864" marT="27432" marB="27432">
                     <a:solidFill>
-                      <a:srgbClr val="1D2735"/>
+                      <a:srgbClr val="1C2634"/>
                     </a:solidFill>
                   </a:tcPr>
                 </a:tc>
@@ -7065,22 +7053,22 @@
                           <a:solidFill>
                             <a:srgbClr val="FFFFFF"/>
                           </a:solidFill>
-                          <a:latin typeface="Aptos"/>
+                          <a:latin typeface="Helvetica Neue"/>
                         </a:defRPr>
                       </a:pPr>
                       <a:r>
-                        <a:t>Direction</a:t>
+                        <a:t>Read</a:t>
                       </a:r>
                     </a:p>
                   </a:txBody>
-                  <a:tcPr marL="45720" marR="45720" marT="27432" marB="27432">
+                  <a:tcPr marL="54864" marR="54864" marT="27432" marB="27432">
                     <a:solidFill>
-                      <a:srgbClr val="1D2735"/>
+                      <a:srgbClr val="1C2634"/>
                     </a:solidFill>
                   </a:tcPr>
                 </a:tc>
               </a:tr>
-              <a:tr h="570585">
+              <a:tr h="493776">
                 <a:tc>
                   <a:txBody>
                     <a:bodyPr/>
@@ -7089,19 +7077,19 @@
                       <a:pPr>
                         <a:defRPr sz="1200" b="0">
                           <a:solidFill>
-                            <a:srgbClr val="1D2735"/>
+                            <a:srgbClr val="1C2634"/>
                           </a:solidFill>
-                          <a:latin typeface="Aptos"/>
+                          <a:latin typeface="Helvetica Neue"/>
                         </a:defRPr>
                       </a:pPr>
                       <a:r>
-                        <a:t>Exact full call</a:t>
+                        <a:t>Exact full calls</a:t>
                       </a:r>
                     </a:p>
                   </a:txBody>
-                  <a:tcPr marL="45720" marR="45720" marT="27432" marB="27432">
+                  <a:tcPr marL="54864" marR="54864" marT="27432" marB="27432">
                     <a:solidFill>
-                      <a:srgbClr val="F6F8FA"/>
+                      <a:srgbClr val="F6F8FB"/>
                     </a:solidFill>
                   </a:tcPr>
                 </a:tc>
@@ -7113,9 +7101,9 @@
                       <a:pPr>
                         <a:defRPr sz="1200" b="0">
                           <a:solidFill>
-                            <a:srgbClr val="1D2735"/>
+                            <a:srgbClr val="1C2634"/>
                           </a:solidFill>
-                          <a:latin typeface="Aptos"/>
+                          <a:latin typeface="Helvetica Neue"/>
                         </a:defRPr>
                       </a:pPr>
                       <a:r>
@@ -7123,9 +7111,9 @@
                       </a:r>
                     </a:p>
                   </a:txBody>
-                  <a:tcPr marL="45720" marR="45720" marT="27432" marB="27432">
+                  <a:tcPr marL="54864" marR="54864" marT="27432" marB="27432">
                     <a:solidFill>
-                      <a:srgbClr val="F6F8FA"/>
+                      <a:srgbClr val="F6F8FB"/>
                     </a:solidFill>
                   </a:tcPr>
                 </a:tc>
@@ -7137,9 +7125,9 @@
                       <a:pPr>
                         <a:defRPr sz="1200" b="0">
                           <a:solidFill>
-                            <a:srgbClr val="1D2735"/>
+                            <a:srgbClr val="1C2634"/>
                           </a:solidFill>
-                          <a:latin typeface="Aptos"/>
+                          <a:latin typeface="Helvetica Neue"/>
                         </a:defRPr>
                       </a:pPr>
                       <a:r>
@@ -7147,9 +7135,9 @@
                       </a:r>
                     </a:p>
                   </a:txBody>
-                  <a:tcPr marL="45720" marR="45720" marT="27432" marB="27432">
+                  <a:tcPr marL="54864" marR="54864" marT="27432" marB="27432">
                     <a:solidFill>
-                      <a:srgbClr val="F6F8FA"/>
+                      <a:srgbClr val="F6F8FB"/>
                     </a:solidFill>
                   </a:tcPr>
                 </a:tc>
@@ -7161,9 +7149,9 @@
                       <a:pPr>
                         <a:defRPr sz="1200" b="0">
                           <a:solidFill>
-                            <a:srgbClr val="1D2735"/>
+                            <a:srgbClr val="1C2634"/>
                           </a:solidFill>
-                          <a:latin typeface="Aptos"/>
+                          <a:latin typeface="Helvetica Neue"/>
                         </a:defRPr>
                       </a:pPr>
                       <a:r>
@@ -7171,14 +7159,14 @@
                       </a:r>
                     </a:p>
                   </a:txBody>
-                  <a:tcPr marL="45720" marR="45720" marT="27432" marB="27432">
+                  <a:tcPr marL="54864" marR="54864" marT="27432" marB="27432">
                     <a:solidFill>
-                      <a:srgbClr val="F6F8FA"/>
+                      <a:srgbClr val="F6F8FB"/>
                     </a:solidFill>
                   </a:tcPr>
                 </a:tc>
               </a:tr>
-              <a:tr h="570585">
+              <a:tr h="493776">
                 <a:tc>
                   <a:txBody>
                     <a:bodyPr/>
@@ -7187,9 +7175,9 @@
                       <a:pPr>
                         <a:defRPr sz="1200" b="0">
                           <a:solidFill>
-                            <a:srgbClr val="1D2735"/>
+                            <a:srgbClr val="1C2634"/>
                           </a:solidFill>
-                          <a:latin typeface="Aptos"/>
+                          <a:latin typeface="Helvetica Neue"/>
                         </a:defRPr>
                       </a:pPr>
                       <a:r>
@@ -7197,7 +7185,7 @@
                       </a:r>
                     </a:p>
                   </a:txBody>
-                  <a:tcPr marL="45720" marR="45720" marT="27432" marB="27432">
+                  <a:tcPr marL="54864" marR="54864" marT="27432" marB="27432">
                     <a:solidFill>
                       <a:srgbClr val="FFFFFF"/>
                     </a:solidFill>
@@ -7211,9 +7199,9 @@
                       <a:pPr>
                         <a:defRPr sz="1200" b="0">
                           <a:solidFill>
-                            <a:srgbClr val="1D2735"/>
+                            <a:srgbClr val="1C2634"/>
                           </a:solidFill>
-                          <a:latin typeface="Aptos"/>
+                          <a:latin typeface="Helvetica Neue"/>
                         </a:defRPr>
                       </a:pPr>
                       <a:r>
@@ -7221,7 +7209,7 @@
                       </a:r>
                     </a:p>
                   </a:txBody>
-                  <a:tcPr marL="45720" marR="45720" marT="27432" marB="27432">
+                  <a:tcPr marL="54864" marR="54864" marT="27432" marB="27432">
                     <a:solidFill>
                       <a:srgbClr val="FFFFFF"/>
                     </a:solidFill>
@@ -7235,9 +7223,9 @@
                       <a:pPr>
                         <a:defRPr sz="1200" b="0">
                           <a:solidFill>
-                            <a:srgbClr val="1D2735"/>
+                            <a:srgbClr val="1C2634"/>
                           </a:solidFill>
-                          <a:latin typeface="Aptos"/>
+                          <a:latin typeface="Helvetica Neue"/>
                         </a:defRPr>
                       </a:pPr>
                       <a:r>
@@ -7245,7 +7233,7 @@
                       </a:r>
                     </a:p>
                   </a:txBody>
-                  <a:tcPr marL="45720" marR="45720" marT="27432" marB="27432">
+                  <a:tcPr marL="54864" marR="54864" marT="27432" marB="27432">
                     <a:solidFill>
                       <a:srgbClr val="FFFFFF"/>
                     </a:solidFill>
@@ -7259,24 +7247,24 @@
                       <a:pPr>
                         <a:defRPr sz="1200" b="0">
                           <a:solidFill>
-                            <a:srgbClr val="1D2735"/>
+                            <a:srgbClr val="1C2634"/>
                           </a:solidFill>
-                          <a:latin typeface="Aptos"/>
+                          <a:latin typeface="Helvetica Neue"/>
                         </a:defRPr>
                       </a:pPr>
                       <a:r>
-                        <a:t>B much lower</a:t>
+                        <a:t>B lower</a:t>
                       </a:r>
                     </a:p>
                   </a:txBody>
-                  <a:tcPr marL="45720" marR="45720" marT="27432" marB="27432">
+                  <a:tcPr marL="54864" marR="54864" marT="27432" marB="27432">
                     <a:solidFill>
                       <a:srgbClr val="FFFFFF"/>
                     </a:solidFill>
                   </a:tcPr>
                 </a:tc>
               </a:tr>
-              <a:tr h="570585">
+              <a:tr h="493776">
                 <a:tc>
                   <a:txBody>
                     <a:bodyPr/>
@@ -7285,9 +7273,9 @@
                       <a:pPr>
                         <a:defRPr sz="1200" b="0">
                           <a:solidFill>
-                            <a:srgbClr val="1D2735"/>
+                            <a:srgbClr val="1C2634"/>
                           </a:solidFill>
-                          <a:latin typeface="Aptos"/>
+                          <a:latin typeface="Helvetica Neue"/>
                         </a:defRPr>
                       </a:pPr>
                       <a:r>
@@ -7295,9 +7283,9 @@
                       </a:r>
                     </a:p>
                   </a:txBody>
-                  <a:tcPr marL="45720" marR="45720" marT="27432" marB="27432">
+                  <a:tcPr marL="54864" marR="54864" marT="27432" marB="27432">
                     <a:solidFill>
-                      <a:srgbClr val="F6F8FA"/>
+                      <a:srgbClr val="F6F8FB"/>
                     </a:solidFill>
                   </a:tcPr>
                 </a:tc>
@@ -7309,9 +7297,9 @@
                       <a:pPr>
                         <a:defRPr sz="1200" b="0">
                           <a:solidFill>
-                            <a:srgbClr val="1D2735"/>
+                            <a:srgbClr val="1C2634"/>
                           </a:solidFill>
-                          <a:latin typeface="Aptos"/>
+                          <a:latin typeface="Helvetica Neue"/>
                         </a:defRPr>
                       </a:pPr>
                       <a:r>
@@ -7319,9 +7307,9 @@
                       </a:r>
                     </a:p>
                   </a:txBody>
-                  <a:tcPr marL="45720" marR="45720" marT="27432" marB="27432">
+                  <a:tcPr marL="54864" marR="54864" marT="27432" marB="27432">
                     <a:solidFill>
-                      <a:srgbClr val="F6F8FA"/>
+                      <a:srgbClr val="F6F8FB"/>
                     </a:solidFill>
                   </a:tcPr>
                 </a:tc>
@@ -7333,9 +7321,9 @@
                       <a:pPr>
                         <a:defRPr sz="1200" b="0">
                           <a:solidFill>
-                            <a:srgbClr val="1D2735"/>
+                            <a:srgbClr val="1C2634"/>
                           </a:solidFill>
-                          <a:latin typeface="Aptos"/>
+                          <a:latin typeface="Helvetica Neue"/>
                         </a:defRPr>
                       </a:pPr>
                       <a:r>
@@ -7343,9 +7331,9 @@
                       </a:r>
                     </a:p>
                   </a:txBody>
-                  <a:tcPr marL="45720" marR="45720" marT="27432" marB="27432">
+                  <a:tcPr marL="54864" marR="54864" marT="27432" marB="27432">
                     <a:solidFill>
-                      <a:srgbClr val="F6F8FA"/>
+                      <a:srgbClr val="F6F8FB"/>
                     </a:solidFill>
                   </a:tcPr>
                 </a:tc>
@@ -7357,9 +7345,9 @@
                       <a:pPr>
                         <a:defRPr sz="1200" b="0">
                           <a:solidFill>
-                            <a:srgbClr val="1D2735"/>
+                            <a:srgbClr val="1C2634"/>
                           </a:solidFill>
-                          <a:latin typeface="Aptos"/>
+                          <a:latin typeface="Helvetica Neue"/>
                         </a:defRPr>
                       </a:pPr>
                       <a:r>
@@ -7367,14 +7355,14 @@
                       </a:r>
                     </a:p>
                   </a:txBody>
-                  <a:tcPr marL="45720" marR="45720" marT="27432" marB="27432">
+                  <a:tcPr marL="54864" marR="54864" marT="27432" marB="27432">
                     <a:solidFill>
-                      <a:srgbClr val="F6F8FA"/>
+                      <a:srgbClr val="F6F8FB"/>
                     </a:solidFill>
                   </a:tcPr>
                 </a:tc>
               </a:tr>
-              <a:tr h="570588">
+              <a:tr h="493776">
                 <a:tc>
                   <a:txBody>
                     <a:bodyPr/>
@@ -7383,9 +7371,9 @@
                       <a:pPr>
                         <a:defRPr sz="1200" b="0">
                           <a:solidFill>
-                            <a:srgbClr val="1D2735"/>
+                            <a:srgbClr val="1C2634"/>
                           </a:solidFill>
-                          <a:latin typeface="Aptos"/>
+                          <a:latin typeface="Helvetica Neue"/>
                         </a:defRPr>
                       </a:pPr>
                       <a:r>
@@ -7393,7 +7381,7 @@
                       </a:r>
                     </a:p>
                   </a:txBody>
-                  <a:tcPr marL="45720" marR="45720" marT="27432" marB="27432">
+                  <a:tcPr marL="54864" marR="54864" marT="27432" marB="27432">
                     <a:solidFill>
                       <a:srgbClr val="FFFFFF"/>
                     </a:solidFill>
@@ -7407,9 +7395,9 @@
                       <a:pPr>
                         <a:defRPr sz="1200" b="0">
                           <a:solidFill>
-                            <a:srgbClr val="1D2735"/>
+                            <a:srgbClr val="1C2634"/>
                           </a:solidFill>
-                          <a:latin typeface="Aptos"/>
+                          <a:latin typeface="Helvetica Neue"/>
                         </a:defRPr>
                       </a:pPr>
                       <a:r>
@@ -7417,7 +7405,7 @@
                       </a:r>
                     </a:p>
                   </a:txBody>
-                  <a:tcPr marL="45720" marR="45720" marT="27432" marB="27432">
+                  <a:tcPr marL="54864" marR="54864" marT="27432" marB="27432">
                     <a:solidFill>
                       <a:srgbClr val="FFFFFF"/>
                     </a:solidFill>
@@ -7431,9 +7419,9 @@
                       <a:pPr>
                         <a:defRPr sz="1200" b="0">
                           <a:solidFill>
-                            <a:srgbClr val="1D2735"/>
+                            <a:srgbClr val="1C2634"/>
                           </a:solidFill>
-                          <a:latin typeface="Aptos"/>
+                          <a:latin typeface="Helvetica Neue"/>
                         </a:defRPr>
                       </a:pPr>
                       <a:r>
@@ -7441,7 +7429,7 @@
                       </a:r>
                     </a:p>
                   </a:txBody>
-                  <a:tcPr marL="45720" marR="45720" marT="27432" marB="27432">
+                  <a:tcPr marL="54864" marR="54864" marT="27432" marB="27432">
                     <a:solidFill>
                       <a:srgbClr val="FFFFFF"/>
                     </a:solidFill>
@@ -7455,9 +7443,9 @@
                       <a:pPr>
                         <a:defRPr sz="1200" b="0">
                           <a:solidFill>
-                            <a:srgbClr val="1D2735"/>
+                            <a:srgbClr val="1C2634"/>
                           </a:solidFill>
-                          <a:latin typeface="Aptos"/>
+                          <a:latin typeface="Helvetica Neue"/>
                         </a:defRPr>
                       </a:pPr>
                       <a:r>
@@ -7465,7 +7453,7 @@
                       </a:r>
                     </a:p>
                   </a:txBody>
-                  <a:tcPr marL="45720" marR="45720" marT="27432" marB="27432">
+                  <a:tcPr marL="54864" marR="54864" marT="27432" marB="27432">
                     <a:solidFill>
                       <a:srgbClr val="FFFFFF"/>
                     </a:solidFill>
@@ -7478,46 +7466,40 @@
       </p:graphicFrame>
       <p:sp>
         <p:nvSpPr>
-          <p:cNvPr id="6" name="Rounded Rectangle 5"/>
-          <p:cNvSpPr/>
-          <p:nvPr/>
-        </p:nvSpPr>
-        <p:spPr>
-          <a:xfrm>
-            <a:off x="7388352" y="1572768"/>
-            <a:ext cx="3703320" cy="2761488"/>
-          </a:xfrm>
-          <a:prstGeom prst="roundRect">
-            <a:avLst/>
-          </a:prstGeom>
-          <a:solidFill>
-            <a:srgbClr val="FFFFFF"/>
-          </a:solidFill>
-          <a:ln w="9525">
-            <a:solidFill>
-              <a:srgbClr val="D9DEE5"/>
-            </a:solidFill>
-          </a:ln>
-        </p:spPr>
-        <p:style>
-          <a:lnRef idx="1">
-            <a:schemeClr val="accent1"/>
-          </a:lnRef>
-          <a:fillRef idx="3">
-            <a:schemeClr val="accent1"/>
-          </a:fillRef>
-          <a:effectRef idx="2">
-            <a:schemeClr val="accent1"/>
-          </a:effectRef>
-          <a:fontRef idx="minor">
-            <a:schemeClr val="lt1"/>
-          </a:fontRef>
-        </p:style>
-        <p:txBody>
-          <a:bodyPr rtlCol="0" anchor="ctr"/>
-          <a:lstStyle/>
-          <a:p>
-            <a:pPr algn="ctr"/>
+          <p:cNvPr id="6" name="TextBox 5"/>
+          <p:cNvSpPr txBox="1"/>
+          <p:nvPr/>
+        </p:nvSpPr>
+        <p:spPr>
+          <a:xfrm>
+            <a:off x="914400" y="4645152"/>
+            <a:ext cx="1828800" cy="274320"/>
+          </a:xfrm>
+          <a:prstGeom prst="rect">
+            <a:avLst/>
+          </a:prstGeom>
+          <a:noFill/>
+        </p:spPr>
+        <p:txBody>
+          <a:bodyPr wrap="square" lIns="27432" rIns="27432" tIns="18288" bIns="18288" anchor="t">
+            <a:spAutoFit/>
+          </a:bodyPr>
+          <a:lstStyle/>
+          <a:p>
+            <a:pPr algn="l">
+              <a:spcAft>
+                <a:spcPts val="300"/>
+              </a:spcAft>
+            </a:pPr>
+            <a:r>
+              <a:rPr sz="2100" b="1">
+                <a:solidFill>
+                  <a:srgbClr val="128479"/>
+                </a:solidFill>
+                <a:latin typeface="Helvetica Neue"/>
+              </a:rPr>
+              <a:t>Takeaway</a:t>
+            </a:r>
           </a:p>
         </p:txBody>
       </p:sp>
@@ -7529,8 +7511,8 @@
         </p:nvSpPr>
         <p:spPr>
           <a:xfrm>
-            <a:off x="7699248" y="1874519"/>
-            <a:ext cx="3072384" cy="310896"/>
+            <a:off x="2761488" y="4663440"/>
+            <a:ext cx="8046720" cy="292608"/>
           </a:xfrm>
           <a:prstGeom prst="rect">
             <a:avLst/>
@@ -7538,20 +7520,24 @@
           <a:noFill/>
         </p:spPr>
         <p:txBody>
-          <a:bodyPr wrap="none" lIns="36576" rIns="36576" tIns="18288" bIns="18288" anchor="t">
+          <a:bodyPr wrap="square" lIns="27432" rIns="27432" tIns="18288" bIns="18288" anchor="t">
             <a:spAutoFit/>
           </a:bodyPr>
           <a:lstStyle/>
           <a:p>
-            <a:pPr algn="l"/>
-            <a:r>
-              <a:rPr sz="2100" b="1">
-                <a:solidFill>
-                  <a:srgbClr val="1D2735"/>
-                </a:solidFill>
-                <a:latin typeface="Aptos"/>
+            <a:pPr algn="l">
+              <a:spcAft>
+                <a:spcPts val="300"/>
+              </a:spcAft>
+            </a:pPr>
+            <a:r>
+              <a:rPr sz="1800" b="0">
+                <a:solidFill>
+                  <a:srgbClr val="1C2634"/>
+                </a:solidFill>
+                <a:latin typeface="Helvetica Neue"/>
               </a:rPr>
-              <a:t>Takeaway</a:t>
+              <a:t>B chooses the right API more often, but exact formatting is less stable.</a:t>
             </a:r>
           </a:p>
         </p:txBody>
@@ -7564,8 +7550,8 @@
         </p:nvSpPr>
         <p:spPr>
           <a:xfrm>
-            <a:off x="7699248" y="2487168"/>
-            <a:ext cx="2944368" cy="1078992"/>
+            <a:off x="658368" y="6464808"/>
+            <a:ext cx="2743200" cy="164592"/>
           </a:xfrm>
           <a:prstGeom prst="rect">
             <a:avLst/>
@@ -7573,20 +7559,24 @@
           <a:noFill/>
         </p:spPr>
         <p:txBody>
-          <a:bodyPr wrap="none" lIns="36576" rIns="36576" tIns="18288" bIns="18288" anchor="t">
+          <a:bodyPr wrap="square" lIns="27432" rIns="27432" tIns="18288" bIns="18288" anchor="t">
             <a:spAutoFit/>
           </a:bodyPr>
           <a:lstStyle/>
           <a:p>
-            <a:pPr algn="l"/>
-            <a:r>
-              <a:rPr sz="1800" b="0">
-                <a:solidFill>
-                  <a:srgbClr val="1D2735"/>
-                </a:solidFill>
-                <a:latin typeface="Aptos"/>
+            <a:pPr algn="l">
+              <a:spcAft>
+                <a:spcPts val="300"/>
+              </a:spcAft>
+            </a:pPr>
+            <a:r>
+              <a:rPr sz="700" b="0">
+                <a:solidFill>
+                  <a:srgbClr val="596880"/>
+                </a:solidFill>
+                <a:latin typeface="Helvetica Neue"/>
               </a:rPr>
-              <a:t>B is much better at choosing the right API, but longer context causes more formatting errors.</a:t>
+              <a:t>CS 590NN Final Project</a:t>
             </a:r>
           </a:p>
         </p:txBody>
@@ -7599,8 +7589,8 @@
         </p:nvSpPr>
         <p:spPr>
           <a:xfrm>
-            <a:off x="603504" y="6437376"/>
-            <a:ext cx="2926080" cy="201168"/>
+            <a:off x="11320272" y="6464808"/>
+            <a:ext cx="228600" cy="164592"/>
           </a:xfrm>
           <a:prstGeom prst="rect">
             <a:avLst/>
@@ -7608,53 +7598,22 @@
           <a:noFill/>
         </p:spPr>
         <p:txBody>
-          <a:bodyPr wrap="none" lIns="36576" rIns="36576" tIns="18288" bIns="18288" anchor="t">
+          <a:bodyPr wrap="square" lIns="27432" rIns="27432" tIns="18288" bIns="18288" anchor="t">
             <a:spAutoFit/>
           </a:bodyPr>
           <a:lstStyle/>
           <a:p>
-            <a:pPr algn="l"/>
-            <a:r>
-              <a:rPr sz="800" b="0">
-                <a:solidFill>
-                  <a:srgbClr val="5E6C84"/>
-                </a:solidFill>
-                <a:latin typeface="Aptos"/>
-              </a:rPr>
-              <a:t>CS 590NN Final Project</a:t>
-            </a:r>
-          </a:p>
-        </p:txBody>
-      </p:sp>
-      <p:sp>
-        <p:nvSpPr>
-          <p:cNvPr id="10" name="TextBox 9"/>
-          <p:cNvSpPr txBox="1"/>
-          <p:nvPr/>
-        </p:nvSpPr>
-        <p:spPr>
-          <a:xfrm>
-            <a:off x="11247120" y="6437376"/>
-            <a:ext cx="320040" cy="201168"/>
-          </a:xfrm>
-          <a:prstGeom prst="rect">
-            <a:avLst/>
-          </a:prstGeom>
-          <a:noFill/>
-        </p:spPr>
-        <p:txBody>
-          <a:bodyPr wrap="none" lIns="36576" rIns="36576" tIns="18288" bIns="18288" anchor="t">
-            <a:spAutoFit/>
-          </a:bodyPr>
-          <a:lstStyle/>
-          <a:p>
-            <a:pPr algn="r"/>
-            <a:r>
-              <a:rPr sz="800" b="0">
-                <a:solidFill>
-                  <a:srgbClr val="5E6C84"/>
-                </a:solidFill>
-                <a:latin typeface="Aptos"/>
+            <a:pPr algn="r">
+              <a:spcAft>
+                <a:spcPts val="300"/>
+              </a:spcAft>
+            </a:pPr>
+            <a:r>
+              <a:rPr sz="700" b="0">
+                <a:solidFill>
+                  <a:srgbClr val="596880"/>
+                </a:solidFill>
+                <a:latin typeface="Helvetica Neue"/>
               </a:rPr>
               <a:t>7</a:t>
             </a:r>
@@ -7687,8 +7646,8 @@
         </p:nvSpPr>
         <p:spPr>
           <a:xfrm>
-            <a:off x="594360" y="329184"/>
-            <a:ext cx="9875520" cy="530352"/>
+            <a:off x="658368" y="347472"/>
+            <a:ext cx="10789920" cy="393192"/>
           </a:xfrm>
           <a:prstGeom prst="rect">
             <a:avLst/>
@@ -7696,20 +7655,24 @@
           <a:noFill/>
         </p:spPr>
         <p:txBody>
-          <a:bodyPr wrap="none" lIns="36576" rIns="36576" tIns="18288" bIns="18288" anchor="t">
+          <a:bodyPr wrap="square" lIns="27432" rIns="27432" tIns="18288" bIns="18288" anchor="t">
             <a:spAutoFit/>
           </a:bodyPr>
           <a:lstStyle/>
           <a:p>
-            <a:pPr algn="l"/>
-            <a:r>
-              <a:rPr sz="2900" b="1">
-                <a:solidFill>
-                  <a:srgbClr val="1D2735"/>
-                </a:solidFill>
-                <a:latin typeface="Aptos"/>
+            <a:pPr algn="l">
+              <a:spcAft>
+                <a:spcPts val="300"/>
+              </a:spcAft>
+            </a:pPr>
+            <a:r>
+              <a:rPr sz="2500" b="1">
+                <a:solidFill>
+                  <a:srgbClr val="1C2634"/>
+                </a:solidFill>
+                <a:latin typeface="Helvetica Neue"/>
               </a:rPr>
-              <a:t>Conclusion</a:t>
+              <a:t>Takeaways</a:t>
             </a:r>
           </a:p>
         </p:txBody>
@@ -7722,8 +7685,8 @@
         </p:nvSpPr>
         <p:spPr>
           <a:xfrm>
-            <a:off x="621792" y="850392"/>
-            <a:ext cx="9692640" cy="310896"/>
+            <a:off x="676656" y="786384"/>
+            <a:ext cx="10424160" cy="256032"/>
           </a:xfrm>
           <a:prstGeom prst="rect">
             <a:avLst/>
@@ -7731,18 +7694,22 @@
           <a:noFill/>
         </p:spPr>
         <p:txBody>
-          <a:bodyPr wrap="none" lIns="36576" rIns="36576" tIns="18288" bIns="18288" anchor="t">
+          <a:bodyPr wrap="square" lIns="27432" rIns="27432" tIns="18288" bIns="18288" anchor="t">
             <a:spAutoFit/>
           </a:bodyPr>
           <a:lstStyle/>
           <a:p>
-            <a:pPr algn="l"/>
-            <a:r>
-              <a:rPr sz="1300" b="0">
-                <a:solidFill>
-                  <a:srgbClr val="5E6C84"/>
-                </a:solidFill>
-                <a:latin typeface="Aptos"/>
+            <a:pPr algn="l">
+              <a:spcAft>
+                <a:spcPts val="300"/>
+              </a:spcAft>
+            </a:pPr>
+            <a:r>
+              <a:rPr sz="1100" b="0">
+                <a:solidFill>
+                  <a:srgbClr val="596880"/>
+                </a:solidFill>
+                <a:latin typeface="Helvetica Neue"/>
               </a:rPr>
               <a:t>Current evidence is a single-seed pilot.</a:t>
             </a:r>
@@ -7757,14 +7724,14 @@
         </p:nvSpPr>
         <p:spPr>
           <a:xfrm>
-            <a:off x="603504" y="1152144"/>
-            <a:ext cx="10972800" cy="18288"/>
+            <a:off x="658368" y="1078992"/>
+            <a:ext cx="10881360" cy="18288"/>
           </a:xfrm>
           <a:prstGeom prst="rect">
             <a:avLst/>
           </a:prstGeom>
           <a:solidFill>
-            <a:srgbClr val="D9DEE5"/>
+            <a:srgbClr val="D7DCE4"/>
           </a:solidFill>
           <a:ln>
             <a:noFill/>
@@ -7794,46 +7761,40 @@
       </p:sp>
       <p:sp>
         <p:nvSpPr>
-          <p:cNvPr id="5" name="Rounded Rectangle 4"/>
-          <p:cNvSpPr/>
-          <p:nvPr/>
-        </p:nvSpPr>
-        <p:spPr>
-          <a:xfrm>
-            <a:off x="804672" y="1481328"/>
-            <a:ext cx="3337560" cy="3547872"/>
-          </a:xfrm>
-          <a:prstGeom prst="roundRect">
-            <a:avLst/>
-          </a:prstGeom>
-          <a:solidFill>
-            <a:srgbClr val="FFFFFF"/>
-          </a:solidFill>
-          <a:ln w="9525">
-            <a:solidFill>
-              <a:srgbClr val="D9DEE5"/>
-            </a:solidFill>
-          </a:ln>
-        </p:spPr>
-        <p:style>
-          <a:lnRef idx="1">
-            <a:schemeClr val="accent1"/>
-          </a:lnRef>
-          <a:fillRef idx="3">
-            <a:schemeClr val="accent1"/>
-          </a:fillRef>
-          <a:effectRef idx="2">
-            <a:schemeClr val="accent1"/>
-          </a:effectRef>
-          <a:fontRef idx="minor">
-            <a:schemeClr val="lt1"/>
-          </a:fontRef>
-        </p:style>
-        <p:txBody>
-          <a:bodyPr rtlCol="0" anchor="ctr"/>
-          <a:lstStyle/>
-          <a:p>
-            <a:pPr algn="ctr"/>
+          <p:cNvPr id="5" name="TextBox 4"/>
+          <p:cNvSpPr txBox="1"/>
+          <p:nvPr/>
+        </p:nvSpPr>
+        <p:spPr>
+          <a:xfrm>
+            <a:off x="868680" y="1508760"/>
+            <a:ext cx="3108960" cy="320040"/>
+          </a:xfrm>
+          <a:prstGeom prst="rect">
+            <a:avLst/>
+          </a:prstGeom>
+          <a:noFill/>
+        </p:spPr>
+        <p:txBody>
+          <a:bodyPr wrap="square" lIns="27432" rIns="27432" tIns="18288" bIns="18288" anchor="t">
+            <a:spAutoFit/>
+          </a:bodyPr>
+          <a:lstStyle/>
+          <a:p>
+            <a:pPr algn="l">
+              <a:spcAft>
+                <a:spcPts val="300"/>
+              </a:spcAft>
+            </a:pPr>
+            <a:r>
+              <a:rPr sz="2200" b="1">
+                <a:solidFill>
+                  <a:srgbClr val="128479"/>
+                </a:solidFill>
+                <a:latin typeface="Helvetica Neue"/>
+              </a:rPr>
+              <a:t>What we found</a:t>
+            </a:r>
           </a:p>
         </p:txBody>
       </p:sp>
@@ -7845,8 +7806,8 @@
         </p:nvSpPr>
         <p:spPr>
           <a:xfrm>
-            <a:off x="1097280" y="1792224"/>
-            <a:ext cx="2706624" cy="310896"/>
+            <a:off x="896112" y="2084831"/>
+            <a:ext cx="4389120" cy="1005840"/>
           </a:xfrm>
           <a:prstGeom prst="rect">
             <a:avLst/>
@@ -7854,20 +7815,40 @@
           <a:noFill/>
         </p:spPr>
         <p:txBody>
-          <a:bodyPr wrap="none" lIns="36576" rIns="36576" tIns="18288" bIns="18288" anchor="t">
+          <a:bodyPr wrap="square" lIns="36576" rIns="36576" tIns="18288" bIns="18288">
             <a:spAutoFit/>
           </a:bodyPr>
           <a:lstStyle/>
           <a:p>
-            <a:pPr algn="l"/>
-            <a:r>
-              <a:rPr sz="2200" b="1">
-                <a:solidFill>
-                  <a:srgbClr val="148479"/>
-                </a:solidFill>
-                <a:latin typeface="Aptos"/>
-              </a:rPr>
-              <a:t>What we did</a:t>
+            <a:pPr>
+              <a:spcAft>
+                <a:spcPts val="900"/>
+              </a:spcAft>
+              <a:defRPr sz="1600">
+                <a:solidFill>
+                  <a:srgbClr val="1C2634"/>
+                </a:solidFill>
+                <a:latin typeface="Helvetica Neue"/>
+              </a:defRPr>
+            </a:pPr>
+            <a:r>
+              <a:t>Trajectory context favored exact calls: 56.9% vs 39.2%.</a:t>
+            </a:r>
+          </a:p>
+          <a:p>
+            <a:pPr>
+              <a:spcAft>
+                <a:spcPts val="900"/>
+              </a:spcAft>
+              <a:defRPr sz="1600">
+                <a:solidFill>
+                  <a:srgbClr val="1C2634"/>
+                </a:solidFill>
+                <a:latin typeface="Helvetica Neue"/>
+              </a:defRPr>
+            </a:pPr>
+            <a:r>
+              <a:t>It strongly reduced wrong-API errors: 12 vs 102.</a:t>
             </a:r>
           </a:p>
         </p:txBody>
@@ -7880,8 +7861,8 @@
         </p:nvSpPr>
         <p:spPr>
           <a:xfrm>
-            <a:off x="1097280" y="2359152"/>
-            <a:ext cx="2560320" cy="1298448"/>
+            <a:off x="868680" y="3703320"/>
+            <a:ext cx="2011680" cy="320040"/>
           </a:xfrm>
           <a:prstGeom prst="rect">
             <a:avLst/>
@@ -7889,86 +7870,96 @@
           <a:noFill/>
         </p:spPr>
         <p:txBody>
-          <a:bodyPr wrap="none" lIns="73152" rIns="73152" tIns="27432" bIns="27432">
+          <a:bodyPr wrap="square" lIns="27432" rIns="27432" tIns="18288" bIns="18288" anchor="t">
             <a:spAutoFit/>
           </a:bodyPr>
           <a:lstStyle/>
           <a:p>
+            <a:pPr algn="l">
+              <a:spcAft>
+                <a:spcPts val="300"/>
+              </a:spcAft>
+            </a:pPr>
+            <a:r>
+              <a:rPr sz="2200" b="1">
+                <a:solidFill>
+                  <a:srgbClr val="B54745"/>
+                </a:solidFill>
+                <a:latin typeface="Helvetica Neue"/>
+              </a:rPr>
+              <a:t>Limits</a:t>
+            </a:r>
+          </a:p>
+        </p:txBody>
+      </p:sp>
+      <p:sp>
+        <p:nvSpPr>
+          <p:cNvPr id="8" name="TextBox 7"/>
+          <p:cNvSpPr txBox="1"/>
+          <p:nvPr/>
+        </p:nvSpPr>
+        <p:spPr>
+          <a:xfrm>
+            <a:off x="896112" y="4261104"/>
+            <a:ext cx="4389120" cy="1143000"/>
+          </a:xfrm>
+          <a:prstGeom prst="rect">
+            <a:avLst/>
+          </a:prstGeom>
+          <a:noFill/>
+        </p:spPr>
+        <p:txBody>
+          <a:bodyPr wrap="square" lIns="36576" rIns="36576" tIns="18288" bIns="18288">
+            <a:spAutoFit/>
+          </a:bodyPr>
+          <a:lstStyle/>
+          <a:p>
             <a:pPr>
               <a:spcAft>
-                <a:spcPts val="1000"/>
-              </a:spcAft>
-              <a:defRPr sz="1700">
-                <a:solidFill>
-                  <a:srgbClr val="1D2735"/>
-                </a:solidFill>
-                <a:latin typeface="Aptos"/>
+                <a:spcPts val="900"/>
+              </a:spcAft>
+              <a:defRPr sz="1600">
+                <a:solidFill>
+                  <a:srgbClr val="1C2634"/>
+                </a:solidFill>
+                <a:latin typeface="Helvetica Neue"/>
               </a:defRPr>
             </a:pPr>
             <a:r>
-              <a:t>A controlled process-proxy comparison for continual API-call learning.</a:t>
+              <a:t>One seed.</a:t>
             </a:r>
           </a:p>
           <a:p>
             <a:pPr>
               <a:spcAft>
-                <a:spcPts val="1000"/>
-              </a:spcAft>
-              <a:defRPr sz="1700">
-                <a:solidFill>
-                  <a:srgbClr val="1D2735"/>
-                </a:solidFill>
-                <a:latin typeface="Aptos"/>
+                <a:spcPts val="900"/>
+              </a:spcAft>
+              <a:defRPr sz="1600">
+                <a:solidFill>
+                  <a:srgbClr val="1C2634"/>
+                </a:solidFill>
+                <a:latin typeface="Helvetica Neue"/>
               </a:defRPr>
             </a:pPr>
             <a:r>
-              <a:t>Full matrix evaluation across a sequential tool-use stream.</a:t>
-            </a:r>
-          </a:p>
-        </p:txBody>
-      </p:sp>
-      <p:sp>
-        <p:nvSpPr>
-          <p:cNvPr id="8" name="Rounded Rectangle 7"/>
-          <p:cNvSpPr/>
-          <p:nvPr/>
-        </p:nvSpPr>
-        <p:spPr>
-          <a:xfrm>
-            <a:off x="4425696" y="1481328"/>
-            <a:ext cx="3337560" cy="3547872"/>
-          </a:xfrm>
-          <a:prstGeom prst="roundRect">
-            <a:avLst/>
-          </a:prstGeom>
-          <a:solidFill>
-            <a:srgbClr val="FFFFFF"/>
-          </a:solidFill>
-          <a:ln w="9525">
-            <a:solidFill>
-              <a:srgbClr val="D9DEE5"/>
-            </a:solidFill>
-          </a:ln>
-        </p:spPr>
-        <p:style>
-          <a:lnRef idx="1">
-            <a:schemeClr val="accent1"/>
-          </a:lnRef>
-          <a:fillRef idx="3">
-            <a:schemeClr val="accent1"/>
-          </a:fillRef>
-          <a:effectRef idx="2">
-            <a:schemeClr val="accent1"/>
-          </a:effectRef>
-          <a:fontRef idx="minor">
-            <a:schemeClr val="lt1"/>
-          </a:fontRef>
-        </p:style>
-        <p:txBody>
-          <a:bodyPr rtlCol="0" anchor="ctr"/>
-          <a:lstStyle/>
-          <a:p>
-            <a:pPr algn="ctr"/>
+              <a:t>B has more tokens.</a:t>
+            </a:r>
+          </a:p>
+          <a:p>
+            <a:pPr>
+              <a:spcAft>
+                <a:spcPts val="900"/>
+              </a:spcAft>
+              <a:defRPr sz="1600">
+                <a:solidFill>
+                  <a:srgbClr val="1C2634"/>
+                </a:solidFill>
+                <a:latin typeface="Helvetica Neue"/>
+              </a:defRPr>
+            </a:pPr>
+            <a:r>
+              <a:t>Next-call benchmark, not full task success.</a:t>
+            </a:r>
           </a:p>
         </p:txBody>
       </p:sp>
@@ -7980,8 +7971,8 @@
         </p:nvSpPr>
         <p:spPr>
           <a:xfrm>
-            <a:off x="4718304" y="1792224"/>
-            <a:ext cx="2706624" cy="310896"/>
+            <a:off x="6675120" y="1508760"/>
+            <a:ext cx="1828800" cy="320040"/>
           </a:xfrm>
           <a:prstGeom prst="rect">
             <a:avLst/>
@@ -7989,20 +7980,24 @@
           <a:noFill/>
         </p:spPr>
         <p:txBody>
-          <a:bodyPr wrap="none" lIns="36576" rIns="36576" tIns="18288" bIns="18288" anchor="t">
+          <a:bodyPr wrap="square" lIns="27432" rIns="27432" tIns="18288" bIns="18288" anchor="t">
             <a:spAutoFit/>
           </a:bodyPr>
           <a:lstStyle/>
           <a:p>
-            <a:pPr algn="l"/>
+            <a:pPr algn="l">
+              <a:spcAft>
+                <a:spcPts val="300"/>
+              </a:spcAft>
+            </a:pPr>
             <a:r>
               <a:rPr sz="2200" b="1">
                 <a:solidFill>
-                  <a:srgbClr val="B94846"/>
-                </a:solidFill>
-                <a:latin typeface="Aptos"/>
+                  <a:srgbClr val="AE7A25"/>
+                </a:solidFill>
+                <a:latin typeface="Helvetica Neue"/>
               </a:rPr>
-              <a:t>Limits</a:t>
+              <a:t>Next</a:t>
             </a:r>
           </a:p>
         </p:txBody>
@@ -8015,8 +8010,8 @@
         </p:nvSpPr>
         <p:spPr>
           <a:xfrm>
-            <a:off x="4718304" y="2359152"/>
-            <a:ext cx="2560320" cy="1298448"/>
+            <a:off x="6693408" y="2084831"/>
+            <a:ext cx="4206240" cy="1188720"/>
           </a:xfrm>
           <a:prstGeom prst="rect">
             <a:avLst/>
@@ -8024,7 +8019,7 @@
           <a:noFill/>
         </p:spPr>
         <p:txBody>
-          <a:bodyPr wrap="none" lIns="73152" rIns="73152" tIns="27432" bIns="27432">
+          <a:bodyPr wrap="square" lIns="36576" rIns="36576" tIns="18288" bIns="18288">
             <a:spAutoFit/>
           </a:bodyPr>
           <a:lstStyle/>
@@ -8035,13 +8030,13 @@
               </a:spcAft>
               <a:defRPr sz="1700">
                 <a:solidFill>
-                  <a:srgbClr val="1D2735"/>
-                </a:solidFill>
-                <a:latin typeface="Aptos"/>
+                  <a:srgbClr val="1C2634"/>
+                </a:solidFill>
+                <a:latin typeface="Helvetica Neue"/>
               </a:defRPr>
             </a:pPr>
             <a:r>
-              <a:t>Single seed.</a:t>
+              <a:t>Run multiple seeds.</a:t>
             </a:r>
           </a:p>
           <a:p>
@@ -8051,13 +8046,13 @@
               </a:spcAft>
               <a:defRPr sz="1700">
                 <a:solidFill>
-                  <a:srgbClr val="1D2735"/>
-                </a:solidFill>
-                <a:latin typeface="Aptos"/>
+                  <a:srgbClr val="1C2634"/>
+                </a:solidFill>
+                <a:latin typeface="Helvetica Neue"/>
               </a:defRPr>
             </a:pPr>
             <a:r>
-              <a:t>B has more tokens.</a:t>
+              <a:t>Train a token-matched B condition.</a:t>
             </a:r>
           </a:p>
           <a:p>
@@ -8067,59 +8062,53 @@
               </a:spcAft>
               <a:defRPr sz="1700">
                 <a:solidFill>
-                  <a:srgbClr val="1D2735"/>
-                </a:solidFill>
-                <a:latin typeface="Aptos"/>
+                  <a:srgbClr val="1C2634"/>
+                </a:solidFill>
+                <a:latin typeface="Helvetica Neue"/>
               </a:defRPr>
             </a:pPr>
             <a:r>
-              <a:t>Synthetic benchmark and next-call framing.</a:t>
-            </a:r>
-          </a:p>
-        </p:txBody>
-      </p:sp>
-      <p:sp>
-        <p:nvSpPr>
-          <p:cNvPr id="11" name="Rounded Rectangle 10"/>
-          <p:cNvSpPr/>
-          <p:nvPr/>
-        </p:nvSpPr>
-        <p:spPr>
-          <a:xfrm>
-            <a:off x="8046720" y="1481328"/>
-            <a:ext cx="3337560" cy="3547872"/>
-          </a:xfrm>
-          <a:prstGeom prst="roundRect">
-            <a:avLst/>
-          </a:prstGeom>
-          <a:solidFill>
-            <a:srgbClr val="FFFFFF"/>
-          </a:solidFill>
-          <a:ln w="9525">
-            <a:solidFill>
-              <a:srgbClr val="D9DEE5"/>
-            </a:solidFill>
-          </a:ln>
-        </p:spPr>
-        <p:style>
-          <a:lnRef idx="1">
-            <a:schemeClr val="accent1"/>
-          </a:lnRef>
-          <a:fillRef idx="3">
-            <a:schemeClr val="accent1"/>
-          </a:fillRef>
-          <a:effectRef idx="2">
-            <a:schemeClr val="accent1"/>
-          </a:effectRef>
-          <a:fontRef idx="minor">
-            <a:schemeClr val="lt1"/>
-          </a:fontRef>
-        </p:style>
-        <p:txBody>
-          <a:bodyPr rtlCol="0" anchor="ctr"/>
-          <a:lstStyle/>
-          <a:p>
-            <a:pPr algn="ctr"/>
+              <a:t>Add semantic argument scoring.</a:t>
+            </a:r>
+          </a:p>
+        </p:txBody>
+      </p:sp>
+      <p:sp>
+        <p:nvSpPr>
+          <p:cNvPr id="11" name="TextBox 10"/>
+          <p:cNvSpPr txBox="1"/>
+          <p:nvPr/>
+        </p:nvSpPr>
+        <p:spPr>
+          <a:xfrm>
+            <a:off x="914400" y="5806440"/>
+            <a:ext cx="10424160" cy="320040"/>
+          </a:xfrm>
+          <a:prstGeom prst="rect">
+            <a:avLst/>
+          </a:prstGeom>
+          <a:noFill/>
+        </p:spPr>
+        <p:txBody>
+          <a:bodyPr wrap="square" lIns="27432" rIns="27432" tIns="18288" bIns="18288" anchor="t">
+            <a:spAutoFit/>
+          </a:bodyPr>
+          <a:lstStyle/>
+          <a:p>
+            <a:pPr algn="ctr">
+              <a:spcAft>
+                <a:spcPts val="300"/>
+              </a:spcAft>
+            </a:pPr>
+            <a:r>
+              <a:rPr sz="1800" b="1">
+                <a:solidFill>
+                  <a:srgbClr val="1C2634"/>
+                </a:solidFill>
+                <a:latin typeface="Helvetica Neue"/>
+              </a:rPr>
+              <a:t>Bottom line: trajectory context helps tool identity, but exact call formatting still needs work.</a:t>
+            </a:r>
           </a:p>
         </p:txBody>
       </p:sp>
@@ -8131,8 +8120,8 @@
         </p:nvSpPr>
         <p:spPr>
           <a:xfrm>
-            <a:off x="8339327" y="1792224"/>
-            <a:ext cx="2706624" cy="310896"/>
+            <a:off x="658368" y="6464808"/>
+            <a:ext cx="2743200" cy="164592"/>
           </a:xfrm>
           <a:prstGeom prst="rect">
             <a:avLst/>
@@ -8140,20 +8129,24 @@
           <a:noFill/>
         </p:spPr>
         <p:txBody>
-          <a:bodyPr wrap="none" lIns="36576" rIns="36576" tIns="18288" bIns="18288" anchor="t">
+          <a:bodyPr wrap="square" lIns="27432" rIns="27432" tIns="18288" bIns="18288" anchor="t">
             <a:spAutoFit/>
           </a:bodyPr>
           <a:lstStyle/>
           <a:p>
-            <a:pPr algn="l"/>
-            <a:r>
-              <a:rPr sz="2200" b="1">
-                <a:solidFill>
-                  <a:srgbClr val="B78021"/>
-                </a:solidFill>
-                <a:latin typeface="Aptos"/>
+            <a:pPr algn="l">
+              <a:spcAft>
+                <a:spcPts val="300"/>
+              </a:spcAft>
+            </a:pPr>
+            <a:r>
+              <a:rPr sz="700" b="0">
+                <a:solidFill>
+                  <a:srgbClr val="596880"/>
+                </a:solidFill>
+                <a:latin typeface="Helvetica Neue"/>
               </a:rPr>
-              <a:t>Next</a:t>
+              <a:t>CS 590NN Final Project</a:t>
             </a:r>
           </a:p>
         </p:txBody>
@@ -8166,8 +8159,8 @@
         </p:nvSpPr>
         <p:spPr>
           <a:xfrm>
-            <a:off x="8339327" y="2359152"/>
-            <a:ext cx="2560320" cy="1298448"/>
+            <a:off x="11320272" y="6464808"/>
+            <a:ext cx="228600" cy="164592"/>
           </a:xfrm>
           <a:prstGeom prst="rect">
             <a:avLst/>
@@ -8175,159 +8168,22 @@
           <a:noFill/>
         </p:spPr>
         <p:txBody>
-          <a:bodyPr wrap="none" lIns="73152" rIns="73152" tIns="27432" bIns="27432">
+          <a:bodyPr wrap="square" lIns="27432" rIns="27432" tIns="18288" bIns="18288" anchor="t">
             <a:spAutoFit/>
           </a:bodyPr>
           <a:lstStyle/>
           <a:p>
-            <a:pPr>
-              <a:spcAft>
-                <a:spcPts val="1000"/>
-              </a:spcAft>
-              <a:defRPr sz="1700">
-                <a:solidFill>
-                  <a:srgbClr val="1D2735"/>
-                </a:solidFill>
-                <a:latin typeface="Aptos"/>
-              </a:defRPr>
-            </a:pPr>
-            <a:r>
-              <a:t>Run multiple seeds.</a:t>
-            </a:r>
-          </a:p>
-          <a:p>
-            <a:pPr>
-              <a:spcAft>
-                <a:spcPts val="1000"/>
-              </a:spcAft>
-              <a:defRPr sz="1700">
-                <a:solidFill>
-                  <a:srgbClr val="1D2735"/>
-                </a:solidFill>
-                <a:latin typeface="Aptos"/>
-              </a:defRPr>
-            </a:pPr>
-            <a:r>
-              <a:t>Token-match the conditions.</a:t>
-            </a:r>
-          </a:p>
-          <a:p>
-            <a:pPr>
-              <a:spcAft>
-                <a:spcPts val="1000"/>
-              </a:spcAft>
-              <a:defRPr sz="1700">
-                <a:solidFill>
-                  <a:srgbClr val="1D2735"/>
-                </a:solidFill>
-                <a:latin typeface="Aptos"/>
-              </a:defRPr>
-            </a:pPr>
-            <a:r>
-              <a:t>Add semantic argument scoring.</a:t>
-            </a:r>
-          </a:p>
-        </p:txBody>
-      </p:sp>
-      <p:sp>
-        <p:nvSpPr>
-          <p:cNvPr id="14" name="TextBox 13"/>
-          <p:cNvSpPr txBox="1"/>
-          <p:nvPr/>
-        </p:nvSpPr>
-        <p:spPr>
-          <a:xfrm>
-            <a:off x="1078992" y="5559552"/>
-            <a:ext cx="9921240" cy="402336"/>
-          </a:xfrm>
-          <a:prstGeom prst="rect">
-            <a:avLst/>
-          </a:prstGeom>
-          <a:noFill/>
-        </p:spPr>
-        <p:txBody>
-          <a:bodyPr wrap="none" lIns="36576" rIns="36576" tIns="18288" bIns="18288" anchor="t">
-            <a:spAutoFit/>
-          </a:bodyPr>
-          <a:lstStyle/>
-          <a:p>
-            <a:pPr algn="ctr"/>
-            <a:r>
-              <a:rPr sz="1900" b="1">
-                <a:solidFill>
-                  <a:srgbClr val="1D2735"/>
-                </a:solidFill>
-                <a:latin typeface="Aptos"/>
-              </a:rPr>
-              <a:t>Keeping observable trajectory context improves tool identity and final exact-call accuracy in this setup.</a:t>
-            </a:r>
-          </a:p>
-        </p:txBody>
-      </p:sp>
-      <p:sp>
-        <p:nvSpPr>
-          <p:cNvPr id="15" name="TextBox 14"/>
-          <p:cNvSpPr txBox="1"/>
-          <p:nvPr/>
-        </p:nvSpPr>
-        <p:spPr>
-          <a:xfrm>
-            <a:off x="603504" y="6437376"/>
-            <a:ext cx="2926080" cy="201168"/>
-          </a:xfrm>
-          <a:prstGeom prst="rect">
-            <a:avLst/>
-          </a:prstGeom>
-          <a:noFill/>
-        </p:spPr>
-        <p:txBody>
-          <a:bodyPr wrap="none" lIns="36576" rIns="36576" tIns="18288" bIns="18288" anchor="t">
-            <a:spAutoFit/>
-          </a:bodyPr>
-          <a:lstStyle/>
-          <a:p>
-            <a:pPr algn="l"/>
-            <a:r>
-              <a:rPr sz="800" b="0">
-                <a:solidFill>
-                  <a:srgbClr val="5E6C84"/>
-                </a:solidFill>
-                <a:latin typeface="Aptos"/>
-              </a:rPr>
-              <a:t>CS 590NN Final Project</a:t>
-            </a:r>
-          </a:p>
-        </p:txBody>
-      </p:sp>
-      <p:sp>
-        <p:nvSpPr>
-          <p:cNvPr id="16" name="TextBox 15"/>
-          <p:cNvSpPr txBox="1"/>
-          <p:nvPr/>
-        </p:nvSpPr>
-        <p:spPr>
-          <a:xfrm>
-            <a:off x="11247120" y="6437376"/>
-            <a:ext cx="320040" cy="201168"/>
-          </a:xfrm>
-          <a:prstGeom prst="rect">
-            <a:avLst/>
-          </a:prstGeom>
-          <a:noFill/>
-        </p:spPr>
-        <p:txBody>
-          <a:bodyPr wrap="none" lIns="36576" rIns="36576" tIns="18288" bIns="18288" anchor="t">
-            <a:spAutoFit/>
-          </a:bodyPr>
-          <a:lstStyle/>
-          <a:p>
-            <a:pPr algn="r"/>
-            <a:r>
-              <a:rPr sz="800" b="0">
-                <a:solidFill>
-                  <a:srgbClr val="5E6C84"/>
-                </a:solidFill>
-                <a:latin typeface="Aptos"/>
+            <a:pPr algn="r">
+              <a:spcAft>
+                <a:spcPts val="300"/>
+              </a:spcAft>
+            </a:pPr>
+            <a:r>
+              <a:rPr sz="700" b="0">
+                <a:solidFill>
+                  <a:srgbClr val="596880"/>
+                </a:solidFill>
+                <a:latin typeface="Helvetica Neue"/>
               </a:rPr>
               <a:t>8</a:t>
             </a:r>
